--- a/reports/2026-04/weekly/weekly_report_260413.pptx
+++ b/reports/2026-04/weekly/weekly_report_260413.pptx
@@ -1183,100 +1183,6 @@
             <a:fld id="{F7021451-1387-4CA6-816F-3879F97B5CBC}" type="slidenum">
               <a:rPr lang="en-US"/>
               <a:t>3</a:t>
-            </a:fld>
-            <a:endParaRPr lang="en-US"/>
-          </a:p>
-        </p:txBody>
-      </p:sp>
-    </p:spTree>
-    <p:extLst>
-      <p:ext uri="{BB962C8B-B14F-4D97-AF65-F5344CB8AC3E}">
-        <p14:creationId xmlns:p14="http://schemas.microsoft.com/office/powerpoint/2010/main" val="1024086991"/>
-      </p:ext>
-    </p:extLst>
-  </p:cSld>
-  <p:clrMapOvr>
-    <a:masterClrMapping/>
-  </p:clrMapOvr>
-</p:notes>
-</file>
-
-<file path=ppt/notesSlides/notesSlide4.xml><?xml version="1.0" encoding="utf-8"?>
-<p:notes xmlns:a="http://schemas.openxmlformats.org/drawingml/2006/main" xmlns:r="http://schemas.openxmlformats.org/officeDocument/2006/relationships" xmlns:p="http://schemas.openxmlformats.org/presentationml/2006/main">
-  <p:cSld>
-    <p:spTree>
-      <p:nvGrpSpPr>
-        <p:cNvPr id="1" name=""/>
-        <p:cNvGrpSpPr/>
-        <p:nvPr/>
-      </p:nvGrpSpPr>
-      <p:grpSpPr>
-        <a:xfrm>
-          <a:off x="0" y="0"/>
-          <a:ext cx="0" cy="0"/>
-          <a:chOff x="0" y="0"/>
-          <a:chExt cx="0" cy="0"/>
-        </a:xfrm>
-      </p:grpSpPr>
-      <p:sp>
-        <p:nvSpPr>
-          <p:cNvPr id="2" name="Slide Image Placeholder 1"/>
-          <p:cNvSpPr>
-            <a:spLocks noGrp="1" noRot="1" noChangeAspect="1"/>
-          </p:cNvSpPr>
-          <p:nvPr>
-            <p:ph type="sldImg"/>
-          </p:nvPr>
-        </p:nvSpPr>
-        <p:spPr/>
-      </p:sp>
-      <p:sp>
-        <p:nvSpPr>
-          <p:cNvPr id="3" name="Notes Placeholder 2"/>
-          <p:cNvSpPr>
-            <a:spLocks noGrp="1"/>
-          </p:cNvSpPr>
-          <p:nvPr>
-            <p:ph type="body" idx="1"/>
-          </p:nvPr>
-        </p:nvSpPr>
-        <p:spPr/>
-        <p:txBody>
-          <a:bodyPr/>
-          <a:lstStyle/>
-          <a:p>
-            <a:r>
-              <a:rPr lang="en-US" dirty="0"/>
-              <a:t>Phase 1 的重點是架構決策。
-左邊是三個主要的設計決策：
-第一，我們選擇不繼承 Sascha Willems 框架的 VulkanExampleBase。原因是我們的 POC 是純 headless compute，不需要 swapchain、render pass、framebuffer 這些渲染管線的東西。直接管理 Vulkan 物件可以減少不必要的依賴，也讓後續做性能量測的時候路徑更乾淨，不會有框架引入的隱藏 overhead。
-具體來說，VulkanExampleBase 預設會建立 swapchain、render pass、framebuffer、depth buffer、ImGui overlay 等一大堆渲染相關的物件，還有一個每幀都要做 acquire-render-present 的 render loop。這些對我們的 headless compute POC 來說完全是多餘的，而且會引入額外的同步點（semaphore wait、fence wait），干擾性能量測的結果。
-第二，workgraph_poc 是獨立的 CMake target，可以單獨編譯。
-第三，shader 是用 glslangValidator 手動編譯成 SPIR-V 的，.spv 跟 GLSL source 一起提交到 repo。
-右邊是完整的 Vulkan 物件鏈。三個 SSBO — control buffer 是 32 bytes 的控制結構，queue1 和 queue2 各是 8KB 的環形佇列，都使用 HOST_VISIBLE 加 HOST_COHERENT 的記憶體。</a:t>
-            </a:r>
-            <a:endParaRPr lang="en-US" dirty="0"/>
-          </a:p>
-        </p:txBody>
-      </p:sp>
-      <p:sp>
-        <p:nvSpPr>
-          <p:cNvPr id="4" name="Slide Number Placeholder 3"/>
-          <p:cNvSpPr>
-            <a:spLocks noGrp="1"/>
-          </p:cNvSpPr>
-          <p:nvPr>
-            <p:ph type="sldNum" sz="quarter" idx="10"/>
-          </p:nvPr>
-        </p:nvSpPr>
-        <p:spPr/>
-        <p:txBody>
-          <a:bodyPr/>
-          <a:lstStyle/>
-          <a:p>
-            <a:fld id="{F7021451-1387-4CA6-816F-3879F97B5CBC}" type="slidenum">
-              <a:rPr lang="en-US"/>
-              <a:t>4</a:t>
             </a:fld>
             <a:endParaRPr lang="en-US"/>
           </a:p>
@@ -2379,914 +2285,6 @@
 
 <file path=ppt/slides/slide10.xml><?xml version="1.0" encoding="utf-8"?>
 <p:sld xmlns:a="http://schemas.openxmlformats.org/drawingml/2006/main" xmlns:r="http://schemas.openxmlformats.org/officeDocument/2006/relationships" xmlns:p="http://schemas.openxmlformats.org/presentationml/2006/main">
-  <p:cSld name="Slide 10">
-    <p:bg>
-      <p:bgPr>
-        <a:solidFill>
-          <a:srgbClr val="0A1628"/>
-        </a:solidFill>
-      </p:bgPr>
-    </p:bg>
-    <p:spTree>
-      <p:nvGrpSpPr>
-        <p:cNvPr id="1" name=""/>
-        <p:cNvGrpSpPr/>
-        <p:nvPr/>
-      </p:nvGrpSpPr>
-      <p:grpSpPr>
-        <a:xfrm>
-          <a:off x="0" y="0"/>
-          <a:ext cx="0" cy="0"/>
-          <a:chOff x="0" y="0"/>
-          <a:chExt cx="0" cy="0"/>
-        </a:xfrm>
-      </p:grpSpPr>
-      <p:sp>
-        <p:nvSpPr>
-          <p:cNvPr id="2" name="Shape 0"/>
-          <p:cNvSpPr/>
-          <p:nvPr/>
-        </p:nvSpPr>
-        <p:spPr>
-          <a:xfrm>
-            <a:off x="0" y="0"/>
-            <a:ext cx="9144000" cy="54864"/>
-          </a:xfrm>
-          <a:prstGeom prst="rect">
-            <a:avLst/>
-          </a:prstGeom>
-          <a:solidFill>
-            <a:srgbClr val="0D9488"/>
-          </a:solidFill>
-          <a:ln/>
-        </p:spPr>
-      </p:sp>
-      <p:sp>
-        <p:nvSpPr>
-          <p:cNvPr id="3" name="Text 1"/>
-          <p:cNvSpPr/>
-          <p:nvPr/>
-        </p:nvSpPr>
-        <p:spPr>
-          <a:xfrm>
-            <a:off x="640080" y="320040"/>
-            <a:ext cx="8229600" cy="548640"/>
-          </a:xfrm>
-          <a:prstGeom prst="rect">
-            <a:avLst/>
-          </a:prstGeom>
-          <a:noFill/>
-          <a:ln/>
-        </p:spPr>
-        <p:txBody>
-          <a:bodyPr wrap="square" lIns="0" tIns="0" rIns="0" bIns="0" rtlCol="0" anchor="ctr"/>
-          <a:lstStyle/>
-          <a:p>
-            <a:pPr indent="0" marL="0">
-              <a:buNone/>
-            </a:pPr>
-            <a:r>
-              <a:rPr lang="en-US" sz="2400" dirty="0">
-                <a:solidFill>
-                  <a:srgbClr val="FFFFFF"/>
-                </a:solidFill>
-                <a:latin typeface="Arial Black" pitchFamily="34" charset="0"/>
-                <a:ea typeface="Arial Black" pitchFamily="34" charset="-122"/>
-                <a:cs typeface="Arial Black" pitchFamily="34" charset="-120"/>
-              </a:rPr>
-              <a:t>Code: Node C — Consumer &amp; Pipeline Summary</a:t>
-            </a:r>
-            <a:endParaRPr lang="en-US" sz="2400" dirty="0"/>
-          </a:p>
-        </p:txBody>
-      </p:sp>
-      <p:sp>
-        <p:nvSpPr>
-          <p:cNvPr id="4" name="Shape 2"/>
-          <p:cNvSpPr/>
-          <p:nvPr/>
-        </p:nvSpPr>
-        <p:spPr>
-          <a:xfrm>
-            <a:off x="457200" y="1005840"/>
-            <a:ext cx="4572000" cy="2377440"/>
-          </a:xfrm>
-          <a:prstGeom prst="rect">
-            <a:avLst/>
-          </a:prstGeom>
-          <a:solidFill>
-            <a:srgbClr val="0D1B2A"/>
-          </a:solidFill>
-          <a:ln/>
-          <a:effectLst>
-            <a:outerShdw sx="100000" sy="100000" kx="0" ky="0" algn="bl" rotWithShape="0" blurRad="101600" dist="38100" dir="8100000">
-              <a:srgbClr val="000000">
-                <a:alpha val="20000"/>
-              </a:srgbClr>
-            </a:outerShdw>
-          </a:effectLst>
-        </p:spPr>
-      </p:sp>
-      <p:sp>
-        <p:nvSpPr>
-          <p:cNvPr id="5" name="Text 3"/>
-          <p:cNvSpPr/>
-          <p:nvPr/>
-        </p:nvSpPr>
-        <p:spPr>
-          <a:xfrm>
-            <a:off x="640080" y="1143000"/>
-            <a:ext cx="4206240" cy="2103120"/>
-          </a:xfrm>
-          <a:prstGeom prst="rect">
-            <a:avLst/>
-          </a:prstGeom>
-          <a:noFill/>
-          <a:ln/>
-        </p:spPr>
-        <p:txBody>
-          <a:bodyPr wrap="square" lIns="0" tIns="0" rIns="0" bIns="0" rtlCol="0" anchor="ctr"/>
-          <a:lstStyle/>
-          <a:p>
-            <a:pPr indent="0" marL="0">
-              <a:lnSpc>
-                <a:spcPct val="125000"/>
-              </a:lnSpc>
-              <a:buNone/>
-            </a:pPr>
-            <a:r>
-              <a:rPr lang="en-US" sz="1000" dirty="0">
-                <a:solidFill>
-                  <a:srgbClr val="6A9955"/>
-                </a:solidFill>
-                <a:latin typeface="Consolas" pitchFamily="34" charset="0"/>
-                <a:ea typeface="Consolas" pitchFamily="34" charset="-122"/>
-                <a:cs typeface="Consolas" pitchFamily="34" charset="-120"/>
-              </a:rPr>
-              <a:t>// Node C: Consumer (threads 16-31)</a:t>
-            </a:r>
-            <a:endParaRPr lang="en-US" sz="1000" dirty="0"/>
-          </a:p>
-          <a:p>
-            <a:pPr indent="0" marL="0">
-              <a:lnSpc>
-                <a:spcPct val="125000"/>
-              </a:lnSpc>
-              <a:buNone/>
-            </a:pPr>
-            <a:r>
-              <a:rPr lang="en-US" sz="1000" dirty="0">
-                <a:solidFill>
-                  <a:srgbClr val="C586C0"/>
-                </a:solidFill>
-                <a:latin typeface="Consolas" pitchFamily="34" charset="0"/>
-                <a:ea typeface="Consolas" pitchFamily="34" charset="-122"/>
-                <a:cs typeface="Consolas" pitchFamily="34" charset="-120"/>
-              </a:rPr>
-              <a:t>else {</a:t>
-            </a:r>
-            <a:endParaRPr lang="en-US" sz="1000" dirty="0"/>
-          </a:p>
-          <a:p>
-            <a:pPr indent="0" marL="0">
-              <a:lnSpc>
-                <a:spcPct val="125000"/>
-              </a:lnSpc>
-              <a:buNone/>
-            </a:pPr>
-            <a:r>
-              <a:rPr lang="en-US" sz="1000" dirty="0">
-                <a:solidFill>
-                  <a:srgbClr val="94A3B8"/>
-                </a:solidFill>
-                <a:latin typeface="Consolas" pitchFamily="34" charset="0"/>
-                <a:ea typeface="Consolas" pitchFamily="34" charset="-122"/>
-                <a:cs typeface="Consolas" pitchFamily="34" charset="-120"/>
-              </a:rPr>
-              <a:t>  uint cur = control.q2.count;</a:t>
-            </a:r>
-            <a:endParaRPr lang="en-US" sz="1000" dirty="0"/>
-          </a:p>
-          <a:p>
-            <a:pPr indent="0" marL="0">
-              <a:lnSpc>
-                <a:spcPct val="125000"/>
-              </a:lnSpc>
-              <a:buNone/>
-            </a:pPr>
-            <a:r>
-              <a:rPr lang="en-US" sz="1000" dirty="0">
-                <a:solidFill>
-                  <a:srgbClr val="C586C0"/>
-                </a:solidFill>
-                <a:latin typeface="Consolas" pitchFamily="34" charset="0"/>
-                <a:ea typeface="Consolas" pitchFamily="34" charset="-122"/>
-                <a:cs typeface="Consolas" pitchFamily="34" charset="-120"/>
-              </a:rPr>
-              <a:t>  if (cur &gt; 0) {</a:t>
-            </a:r>
-            <a:endParaRPr lang="en-US" sz="1000" dirty="0"/>
-          </a:p>
-          <a:p>
-            <a:pPr indent="0" marL="0">
-              <a:lnSpc>
-                <a:spcPct val="125000"/>
-              </a:lnSpc>
-              <a:buNone/>
-            </a:pPr>
-            <a:r>
-              <a:rPr lang="en-US" sz="1000" dirty="0">
-                <a:solidFill>
-                  <a:srgbClr val="DCDCAA"/>
-                </a:solidFill>
-                <a:latin typeface="Consolas" pitchFamily="34" charset="0"/>
-                <a:ea typeface="Consolas" pitchFamily="34" charset="-122"/>
-                <a:cs typeface="Consolas" pitchFamily="34" charset="-120"/>
-              </a:rPr>
-              <a:t>    if (atomicCompSwap(q2.count,</a:t>
-            </a:r>
-            <a:endParaRPr lang="en-US" sz="1000" dirty="0"/>
-          </a:p>
-          <a:p>
-            <a:pPr indent="0" marL="0">
-              <a:lnSpc>
-                <a:spcPct val="125000"/>
-              </a:lnSpc>
-              <a:buNone/>
-            </a:pPr>
-            <a:r>
-              <a:rPr lang="en-US" sz="1000" dirty="0">
-                <a:solidFill>
-                  <a:srgbClr val="DCDCAA"/>
-                </a:solidFill>
-                <a:latin typeface="Consolas" pitchFamily="34" charset="0"/>
-                <a:ea typeface="Consolas" pitchFamily="34" charset="-122"/>
-                <a:cs typeface="Consolas" pitchFamily="34" charset="-120"/>
-              </a:rPr>
-              <a:t>        cur, cur - 1) == cur) {</a:t>
-            </a:r>
-            <a:endParaRPr lang="en-US" sz="1000" dirty="0"/>
-          </a:p>
-          <a:p>
-            <a:pPr indent="0" marL="0">
-              <a:lnSpc>
-                <a:spcPct val="125000"/>
-              </a:lnSpc>
-              <a:buNone/>
-            </a:pPr>
-            <a:r>
-              <a:rPr lang="en-US" sz="1000" dirty="0">
-                <a:solidFill>
-                  <a:srgbClr val="4EC9B0"/>
-                </a:solidFill>
-                <a:latin typeface="Consolas" pitchFamily="34" charset="0"/>
-                <a:ea typeface="Consolas" pitchFamily="34" charset="-122"/>
-                <a:cs typeface="Consolas" pitchFamily="34" charset="-120"/>
-              </a:rPr>
-              <a:t>      slot = atomicAdd(</a:t>
-            </a:r>
-            <a:endParaRPr lang="en-US" sz="1000" dirty="0"/>
-          </a:p>
-          <a:p>
-            <a:pPr indent="0" marL="0">
-              <a:lnSpc>
-                <a:spcPct val="125000"/>
-              </a:lnSpc>
-              <a:buNone/>
-            </a:pPr>
-            <a:r>
-              <a:rPr lang="en-US" sz="1000" dirty="0">
-                <a:solidFill>
-                  <a:srgbClr val="4EC9B0"/>
-                </a:solidFill>
-                <a:latin typeface="Consolas" pitchFamily="34" charset="0"/>
-                <a:ea typeface="Consolas" pitchFamily="34" charset="-122"/>
-                <a:cs typeface="Consolas" pitchFamily="34" charset="-120"/>
-              </a:rPr>
-              <a:t>        q2.head, 1) % QUEUE_SIZE;</a:t>
-            </a:r>
-            <a:endParaRPr lang="en-US" sz="1000" dirty="0"/>
-          </a:p>
-          <a:p>
-            <a:pPr indent="0" marL="0">
-              <a:lnSpc>
-                <a:spcPct val="125000"/>
-              </a:lnSpc>
-              <a:buNone/>
-            </a:pPr>
-            <a:r>
-              <a:rPr lang="en-US" sz="1000" dirty="0">
-                <a:solidFill>
-                  <a:srgbClr val="94A3B8"/>
-                </a:solidFill>
-                <a:latin typeface="Consolas" pitchFamily="34" charset="0"/>
-                <a:ea typeface="Consolas" pitchFamily="34" charset="-122"/>
-                <a:cs typeface="Consolas" pitchFamily="34" charset="-120"/>
-              </a:rPr>
-              <a:t>      uint data = queue2</a:t>
-            </a:r>
-            <a:endParaRPr lang="en-US" sz="1000" dirty="0"/>
-          </a:p>
-          <a:p>
-            <a:pPr indent="0" marL="0">
-              <a:lnSpc>
-                <a:spcPct val="125000"/>
-              </a:lnSpc>
-              <a:buNone/>
-            </a:pPr>
-            <a:r>
-              <a:rPr lang="en-US" sz="1000" dirty="0">
-                <a:solidFill>
-                  <a:srgbClr val="94A3B8"/>
-                </a:solidFill>
-                <a:latin typeface="Consolas" pitchFamily="34" charset="0"/>
-                <a:ea typeface="Consolas" pitchFamily="34" charset="-122"/>
-                <a:cs typeface="Consolas" pitchFamily="34" charset="-120"/>
-              </a:rPr>
-              <a:t>        .tasks[slot].payload[0];</a:t>
-            </a:r>
-            <a:endParaRPr lang="en-US" sz="1000" dirty="0"/>
-          </a:p>
-          <a:p>
-            <a:pPr indent="0" marL="0">
-              <a:lnSpc>
-                <a:spcPct val="125000"/>
-              </a:lnSpc>
-              <a:buNone/>
-            </a:pPr>
-            <a:r>
-              <a:rPr lang="en-US" sz="1000" dirty="0">
-                <a:solidFill>
-                  <a:srgbClr val="CE9178"/>
-                </a:solidFill>
-                <a:latin typeface="Consolas" pitchFamily="34" charset="0"/>
-                <a:ea typeface="Consolas" pitchFamily="34" charset="-122"/>
-                <a:cs typeface="Consolas" pitchFamily="34" charset="-120"/>
-              </a:rPr>
-              <a:t>      memoryBarrierBuffer();</a:t>
-            </a:r>
-            <a:endParaRPr lang="en-US" sz="1000" dirty="0"/>
-          </a:p>
-          <a:p>
-            <a:pPr indent="0" marL="0">
-              <a:lnSpc>
-                <a:spcPct val="125000"/>
-              </a:lnSpc>
-              <a:buNone/>
-            </a:pPr>
-            <a:endParaRPr lang="en-US" sz="1000" dirty="0"/>
-          </a:p>
-          <a:p>
-            <a:pPr indent="0" marL="0">
-              <a:lnSpc>
-                <a:spcPct val="125000"/>
-              </a:lnSpc>
-              <a:buNone/>
-            </a:pPr>
-            <a:r>
-              <a:rPr lang="en-US" sz="1000" dirty="0">
-                <a:solidFill>
-                  <a:srgbClr val="4EC9B0"/>
-                </a:solidFill>
-                <a:latin typeface="Consolas" pitchFamily="34" charset="0"/>
-                <a:ea typeface="Consolas" pitchFamily="34" charset="-122"/>
-                <a:cs typeface="Consolas" pitchFamily="34" charset="-120"/>
-              </a:rPr>
-              <a:t>      atomicAdd(totalProcessed, 1);</a:t>
-            </a:r>
-            <a:endParaRPr lang="en-US" sz="1000" dirty="0"/>
-          </a:p>
-          <a:p>
-            <a:pPr indent="0" marL="0">
-              <a:lnSpc>
-                <a:spcPct val="125000"/>
-              </a:lnSpc>
-              <a:buNone/>
-            </a:pPr>
-            <a:r>
-              <a:rPr lang="en-US" sz="1000" dirty="0">
-                <a:solidFill>
-                  <a:srgbClr val="C586C0"/>
-                </a:solidFill>
-                <a:latin typeface="Consolas" pitchFamily="34" charset="0"/>
-                <a:ea typeface="Consolas" pitchFamily="34" charset="-122"/>
-                <a:cs typeface="Consolas" pitchFamily="34" charset="-120"/>
-              </a:rPr>
-              <a:t>    }</a:t>
-            </a:r>
-            <a:endParaRPr lang="en-US" sz="1000" dirty="0"/>
-          </a:p>
-          <a:p>
-            <a:pPr indent="0" marL="0">
-              <a:lnSpc>
-                <a:spcPct val="125000"/>
-              </a:lnSpc>
-              <a:buNone/>
-            </a:pPr>
-            <a:r>
-              <a:rPr lang="en-US" sz="1000" dirty="0">
-                <a:solidFill>
-                  <a:srgbClr val="C586C0"/>
-                </a:solidFill>
-                <a:latin typeface="Consolas" pitchFamily="34" charset="0"/>
-                <a:ea typeface="Consolas" pitchFamily="34" charset="-122"/>
-                <a:cs typeface="Consolas" pitchFamily="34" charset="-120"/>
-              </a:rPr>
-              <a:t>  }</a:t>
-            </a:r>
-            <a:endParaRPr lang="en-US" sz="1000" dirty="0"/>
-          </a:p>
-          <a:p>
-            <a:pPr indent="0" marL="0">
-              <a:lnSpc>
-                <a:spcPct val="125000"/>
-              </a:lnSpc>
-              <a:buNone/>
-            </a:pPr>
-            <a:r>
-              <a:rPr lang="en-US" sz="1000" dirty="0">
-                <a:solidFill>
-                  <a:srgbClr val="C586C0"/>
-                </a:solidFill>
-                <a:latin typeface="Consolas" pitchFamily="34" charset="0"/>
-                <a:ea typeface="Consolas" pitchFamily="34" charset="-122"/>
-                <a:cs typeface="Consolas" pitchFamily="34" charset="-120"/>
-              </a:rPr>
-              <a:t>}</a:t>
-            </a:r>
-            <a:endParaRPr lang="en-US" sz="1000" dirty="0"/>
-          </a:p>
-        </p:txBody>
-      </p:sp>
-      <p:sp>
-        <p:nvSpPr>
-          <p:cNvPr id="6" name="Shape 4"/>
-          <p:cNvSpPr/>
-          <p:nvPr/>
-        </p:nvSpPr>
-        <p:spPr>
-          <a:xfrm>
-            <a:off x="5212080" y="1005840"/>
-            <a:ext cx="3657600" cy="2377440"/>
-          </a:xfrm>
-          <a:prstGeom prst="rect">
-            <a:avLst/>
-          </a:prstGeom>
-          <a:solidFill>
-            <a:srgbClr val="1A2D4D"/>
-          </a:solidFill>
-          <a:ln/>
-          <a:effectLst>
-            <a:outerShdw sx="100000" sy="100000" kx="0" ky="0" algn="bl" rotWithShape="0" blurRad="101600" dist="38100" dir="8100000">
-              <a:srgbClr val="000000">
-                <a:alpha val="20000"/>
-              </a:srgbClr>
-            </a:outerShdw>
-          </a:effectLst>
-        </p:spPr>
-      </p:sp>
-      <p:sp>
-        <p:nvSpPr>
-          <p:cNvPr id="7" name="Shape 5"/>
-          <p:cNvSpPr/>
-          <p:nvPr/>
-        </p:nvSpPr>
-        <p:spPr>
-          <a:xfrm>
-            <a:off x="5212080" y="1005840"/>
-            <a:ext cx="64008" cy="2377440"/>
-          </a:xfrm>
-          <a:prstGeom prst="rect">
-            <a:avLst/>
-          </a:prstGeom>
-          <a:solidFill>
-            <a:srgbClr val="06B6D4"/>
-          </a:solidFill>
-          <a:ln/>
-        </p:spPr>
-      </p:sp>
-      <p:sp>
-        <p:nvSpPr>
-          <p:cNvPr id="8" name="Text 6"/>
-          <p:cNvSpPr/>
-          <p:nvPr/>
-        </p:nvSpPr>
-        <p:spPr>
-          <a:xfrm>
-            <a:off x="5486400" y="1097280"/>
-            <a:ext cx="2743200" cy="274320"/>
-          </a:xfrm>
-          <a:prstGeom prst="rect">
-            <a:avLst/>
-          </a:prstGeom>
-          <a:noFill/>
-          <a:ln/>
-        </p:spPr>
-        <p:txBody>
-          <a:bodyPr wrap="square" lIns="0" tIns="0" rIns="0" bIns="0" rtlCol="0" anchor="ctr"/>
-          <a:lstStyle/>
-          <a:p>
-            <a:pPr indent="0" marL="0">
-              <a:buNone/>
-            </a:pPr>
-            <a:r>
-              <a:rPr lang="en-US" sz="1300" dirty="0">
-                <a:solidFill>
-                  <a:srgbClr val="06B6D4"/>
-                </a:solidFill>
-                <a:latin typeface="Arial Black" pitchFamily="34" charset="0"/>
-                <a:ea typeface="Arial Black" pitchFamily="34" charset="-122"/>
-                <a:cs typeface="Arial Black" pitchFamily="34" charset="-120"/>
-              </a:rPr>
-              <a:t>Consumer Pattern</a:t>
-            </a:r>
-            <a:endParaRPr lang="en-US" sz="1300" dirty="0"/>
-          </a:p>
-        </p:txBody>
-      </p:sp>
-      <p:sp>
-        <p:nvSpPr>
-          <p:cNvPr id="9" name="Text 7"/>
-          <p:cNvSpPr/>
-          <p:nvPr/>
-        </p:nvSpPr>
-        <p:spPr>
-          <a:xfrm>
-            <a:off x="5486400" y="1417320"/>
-            <a:ext cx="3108960" cy="1645920"/>
-          </a:xfrm>
-          <a:prstGeom prst="rect">
-            <a:avLst/>
-          </a:prstGeom>
-          <a:noFill/>
-          <a:ln/>
-        </p:spPr>
-        <p:txBody>
-          <a:bodyPr wrap="square" lIns="0" tIns="0" rIns="0" bIns="0" rtlCol="0" anchor="ctr"/>
-          <a:lstStyle/>
-          <a:p>
-            <a:pPr indent="0" marL="0">
-              <a:buNone/>
-            </a:pPr>
-            <a:r>
-              <a:rPr lang="en-US" sz="1100" dirty="0">
-                <a:solidFill>
-                  <a:srgbClr val="94A3B8"/>
-                </a:solidFill>
-                <a:latin typeface="Calibri" pitchFamily="34" charset="0"/>
-                <a:ea typeface="Calibri" pitchFamily="34" charset="-122"/>
-                <a:cs typeface="Calibri" pitchFamily="34" charset="-120"/>
-              </a:rPr>
-              <a:t>Same CAS pop pattern as Node B's Q1 read:</a:t>
-            </a:r>
-            <a:endParaRPr lang="en-US" sz="1100" dirty="0"/>
-          </a:p>
-          <a:p>
-            <a:pPr indent="0" marL="0">
-              <a:buNone/>
-            </a:pPr>
-            <a:endParaRPr lang="en-US" sz="1100" dirty="0"/>
-          </a:p>
-          <a:p>
-            <a:pPr indent="0" marL="0">
-              <a:buNone/>
-            </a:pPr>
-            <a:r>
-              <a:rPr lang="en-US" sz="1100" dirty="0">
-                <a:solidFill>
-                  <a:srgbClr val="FFFFFF"/>
-                </a:solidFill>
-                <a:latin typeface="Calibri" pitchFamily="34" charset="0"/>
-                <a:ea typeface="Calibri" pitchFamily="34" charset="-122"/>
-                <a:cs typeface="Calibri" pitchFamily="34" charset="-120"/>
-              </a:rPr>
-              <a:t>1. Read count (optimistic)</a:t>
-            </a:r>
-            <a:endParaRPr lang="en-US" sz="1100" dirty="0"/>
-          </a:p>
-          <a:p>
-            <a:pPr indent="0" marL="0">
-              <a:buNone/>
-            </a:pPr>
-            <a:r>
-              <a:rPr lang="en-US" sz="1100" dirty="0">
-                <a:solidFill>
-                  <a:srgbClr val="FFFFFF"/>
-                </a:solidFill>
-                <a:latin typeface="Calibri" pitchFamily="34" charset="0"/>
-                <a:ea typeface="Calibri" pitchFamily="34" charset="-122"/>
-                <a:cs typeface="Calibri" pitchFamily="34" charset="-120"/>
-              </a:rPr>
-              <a:t>2. CAS decrement count</a:t>
-            </a:r>
-            <a:endParaRPr lang="en-US" sz="1100" dirty="0"/>
-          </a:p>
-          <a:p>
-            <a:pPr indent="0" marL="0">
-              <a:buNone/>
-            </a:pPr>
-            <a:r>
-              <a:rPr lang="en-US" sz="1100" dirty="0">
-                <a:solidFill>
-                  <a:srgbClr val="FFFFFF"/>
-                </a:solidFill>
-                <a:latin typeface="Calibri" pitchFamily="34" charset="0"/>
-                <a:ea typeface="Calibri" pitchFamily="34" charset="-122"/>
-                <a:cs typeface="Calibri" pitchFamily="34" charset="-120"/>
-              </a:rPr>
-              <a:t>3. atomicAdd head for slot</a:t>
-            </a:r>
-            <a:endParaRPr lang="en-US" sz="1100" dirty="0"/>
-          </a:p>
-          <a:p>
-            <a:pPr indent="0" marL="0">
-              <a:buNone/>
-            </a:pPr>
-            <a:r>
-              <a:rPr lang="en-US" sz="1100" dirty="0">
-                <a:solidFill>
-                  <a:srgbClr val="FFFFFF"/>
-                </a:solidFill>
-                <a:latin typeface="Calibri" pitchFamily="34" charset="0"/>
-                <a:ea typeface="Calibri" pitchFamily="34" charset="-122"/>
-                <a:cs typeface="Calibri" pitchFamily="34" charset="-120"/>
-              </a:rPr>
-              <a:t>4. Read data + barrier</a:t>
-            </a:r>
-            <a:endParaRPr lang="en-US" sz="1100" dirty="0"/>
-          </a:p>
-          <a:p>
-            <a:pPr indent="0" marL="0">
-              <a:buNone/>
-            </a:pPr>
-            <a:endParaRPr lang="en-US" sz="1100" dirty="0"/>
-          </a:p>
-          <a:p>
-            <a:pPr indent="0" marL="0">
-              <a:buNone/>
-            </a:pPr>
-            <a:r>
-              <a:rPr lang="en-US" sz="1100" b="1" dirty="0">
-                <a:solidFill>
-                  <a:srgbClr val="14B8A6"/>
-                </a:solidFill>
-                <a:latin typeface="Calibri" pitchFamily="34" charset="0"/>
-                <a:ea typeface="Calibri" pitchFamily="34" charset="-122"/>
-                <a:cs typeface="Calibri" pitchFamily="34" charset="-120"/>
-              </a:rPr>
-              <a:t>Final step: atomicAdd(totalProcessed, 1)</a:t>
-            </a:r>
-            <a:endParaRPr lang="en-US" sz="1100" dirty="0"/>
-          </a:p>
-          <a:p>
-            <a:pPr indent="0" marL="0">
-              <a:buNone/>
-            </a:pPr>
-            <a:r>
-              <a:rPr lang="en-US" sz="1100" dirty="0">
-                <a:solidFill>
-                  <a:srgbClr val="94A3B8"/>
-                </a:solidFill>
-                <a:latin typeface="Calibri" pitchFamily="34" charset="0"/>
-                <a:ea typeface="Calibri" pitchFamily="34" charset="-122"/>
-                <a:cs typeface="Calibri" pitchFamily="34" charset="-120"/>
-              </a:rPr>
-              <a:t>This is what the host polls to track GPU progress.</a:t>
-            </a:r>
-            <a:endParaRPr lang="en-US" sz="1100" dirty="0"/>
-          </a:p>
-        </p:txBody>
-      </p:sp>
-      <p:sp>
-        <p:nvSpPr>
-          <p:cNvPr id="10" name="Shape 8"/>
-          <p:cNvSpPr/>
-          <p:nvPr/>
-        </p:nvSpPr>
-        <p:spPr>
-          <a:xfrm>
-            <a:off x="457200" y="3657600"/>
-            <a:ext cx="8412480" cy="1188720"/>
-          </a:xfrm>
-          <a:prstGeom prst="rect">
-            <a:avLst/>
-          </a:prstGeom>
-          <a:solidFill>
-            <a:srgbClr val="1A2D4D"/>
-          </a:solidFill>
-          <a:ln/>
-          <a:effectLst>
-            <a:outerShdw sx="100000" sy="100000" kx="0" ky="0" algn="bl" rotWithShape="0" blurRad="101600" dist="38100" dir="8100000">
-              <a:srgbClr val="000000">
-                <a:alpha val="20000"/>
-              </a:srgbClr>
-            </a:outerShdw>
-          </a:effectLst>
-        </p:spPr>
-      </p:sp>
-      <p:sp>
-        <p:nvSpPr>
-          <p:cNvPr id="11" name="Shape 9"/>
-          <p:cNvSpPr/>
-          <p:nvPr/>
-        </p:nvSpPr>
-        <p:spPr>
-          <a:xfrm>
-            <a:off x="457200" y="3657600"/>
-            <a:ext cx="64008" cy="1188720"/>
-          </a:xfrm>
-          <a:prstGeom prst="rect">
-            <a:avLst/>
-          </a:prstGeom>
-          <a:solidFill>
-            <a:srgbClr val="0D9488"/>
-          </a:solidFill>
-          <a:ln/>
-        </p:spPr>
-      </p:sp>
-      <p:sp>
-        <p:nvSpPr>
-          <p:cNvPr id="12" name="Text 10"/>
-          <p:cNvSpPr/>
-          <p:nvPr/>
-        </p:nvSpPr>
-        <p:spPr>
-          <a:xfrm>
-            <a:off x="731520" y="3749040"/>
-            <a:ext cx="7315200" cy="274320"/>
-          </a:xfrm>
-          <a:prstGeom prst="rect">
-            <a:avLst/>
-          </a:prstGeom>
-          <a:noFill/>
-          <a:ln/>
-        </p:spPr>
-        <p:txBody>
-          <a:bodyPr wrap="square" lIns="0" tIns="0" rIns="0" bIns="0" rtlCol="0" anchor="ctr"/>
-          <a:lstStyle/>
-          <a:p>
-            <a:pPr indent="0" marL="0">
-              <a:buNone/>
-            </a:pPr>
-            <a:r>
-              <a:rPr lang="en-US" sz="1400" dirty="0">
-                <a:solidFill>
-                  <a:srgbClr val="14B8A6"/>
-                </a:solidFill>
-                <a:latin typeface="Arial Black" pitchFamily="34" charset="0"/>
-                <a:ea typeface="Arial Black" pitchFamily="34" charset="-122"/>
-                <a:cs typeface="Arial Black" pitchFamily="34" charset="-120"/>
-              </a:rPr>
-              <a:t>Full Pipeline: One Dispatch, Three Roles, Two Queues</a:t>
-            </a:r>
-            <a:endParaRPr lang="en-US" sz="1400" dirty="0"/>
-          </a:p>
-        </p:txBody>
-      </p:sp>
-      <p:sp>
-        <p:nvSpPr>
-          <p:cNvPr id="13" name="Text 11"/>
-          <p:cNvSpPr/>
-          <p:nvPr/>
-        </p:nvSpPr>
-        <p:spPr>
-          <a:xfrm>
-            <a:off x="731520" y="4114800"/>
-            <a:ext cx="7772400" cy="274320"/>
-          </a:xfrm>
-          <a:prstGeom prst="rect">
-            <a:avLst/>
-          </a:prstGeom>
-          <a:noFill/>
-          <a:ln/>
-        </p:spPr>
-        <p:txBody>
-          <a:bodyPr wrap="square" lIns="0" tIns="0" rIns="0" bIns="0" rtlCol="0" anchor="ctr"/>
-          <a:lstStyle/>
-          <a:p>
-            <a:pPr indent="0" marL="0">
-              <a:buNone/>
-            </a:pPr>
-            <a:r>
-              <a:rPr lang="en-US" sz="1200" b="1" dirty="0">
-                <a:solidFill>
-                  <a:srgbClr val="FFFFFF"/>
-                </a:solidFill>
-                <a:latin typeface="Calibri" pitchFamily="34" charset="0"/>
-                <a:ea typeface="Calibri" pitchFamily="34" charset="-122"/>
-                <a:cs typeface="Calibri" pitchFamily="34" charset="-120"/>
-              </a:rPr>
-              <a:t>Node A (1 thread)</a:t>
-            </a:r>
-            <a:pPr indent="0" marL="0">
-              <a:buNone/>
-            </a:pPr>
-            <a:r>
-              <a:rPr lang="en-US" sz="1200" dirty="0">
-                <a:solidFill>
-                  <a:srgbClr val="94A3B8"/>
-                </a:solidFill>
-                <a:latin typeface="Calibri" pitchFamily="34" charset="0"/>
-                <a:ea typeface="Calibri" pitchFamily="34" charset="-122"/>
-                <a:cs typeface="Calibri" pitchFamily="34" charset="-120"/>
-              </a:rPr>
-              <a:t>  --[CAS push Q1]--&gt;  </a:t>
-            </a:r>
-            <a:pPr indent="0" marL="0">
-              <a:buNone/>
-            </a:pPr>
-            <a:r>
-              <a:rPr lang="en-US" sz="1200" b="1" dirty="0">
-                <a:solidFill>
-                  <a:srgbClr val="FFFFFF"/>
-                </a:solidFill>
-                <a:latin typeface="Calibri" pitchFamily="34" charset="0"/>
-                <a:ea typeface="Calibri" pitchFamily="34" charset="-122"/>
-                <a:cs typeface="Calibri" pitchFamily="34" charset="-120"/>
-              </a:rPr>
-              <a:t>Node B (15 threads)</a:t>
-            </a:r>
-            <a:pPr indent="0" marL="0">
-              <a:buNone/>
-            </a:pPr>
-            <a:r>
-              <a:rPr lang="en-US" sz="1200" dirty="0">
-                <a:solidFill>
-                  <a:srgbClr val="94A3B8"/>
-                </a:solidFill>
-                <a:latin typeface="Calibri" pitchFamily="34" charset="0"/>
-                <a:ea typeface="Calibri" pitchFamily="34" charset="-122"/>
-                <a:cs typeface="Calibri" pitchFamily="34" charset="-120"/>
-              </a:rPr>
-              <a:t>  --[CAS push Q2]--&gt;  </a:t>
-            </a:r>
-            <a:pPr indent="0" marL="0">
-              <a:buNone/>
-            </a:pPr>
-            <a:r>
-              <a:rPr lang="en-US" sz="1200" b="1" dirty="0">
-                <a:solidFill>
-                  <a:srgbClr val="FFFFFF"/>
-                </a:solidFill>
-                <a:latin typeface="Calibri" pitchFamily="34" charset="0"/>
-                <a:ea typeface="Calibri" pitchFamily="34" charset="-122"/>
-                <a:cs typeface="Calibri" pitchFamily="34" charset="-120"/>
-              </a:rPr>
-              <a:t>Node C (16 threads)</a:t>
-            </a:r>
-            <a:endParaRPr lang="en-US" sz="1200" dirty="0"/>
-          </a:p>
-        </p:txBody>
-      </p:sp>
-      <p:sp>
-        <p:nvSpPr>
-          <p:cNvPr id="14" name="Text 12"/>
-          <p:cNvSpPr/>
-          <p:nvPr/>
-        </p:nvSpPr>
-        <p:spPr>
-          <a:xfrm>
-            <a:off x="731520" y="4480560"/>
-            <a:ext cx="7772400" cy="274320"/>
-          </a:xfrm>
-          <a:prstGeom prst="rect">
-            <a:avLst/>
-          </a:prstGeom>
-          <a:noFill/>
-          <a:ln/>
-        </p:spPr>
-        <p:txBody>
-          <a:bodyPr wrap="square" lIns="0" tIns="0" rIns="0" bIns="0" rtlCol="0" anchor="ctr"/>
-          <a:lstStyle/>
-          <a:p>
-            <a:pPr indent="0" marL="0">
-              <a:buNone/>
-            </a:pPr>
-            <a:r>
-              <a:rPr lang="en-US" sz="1200" i="1" dirty="0">
-                <a:solidFill>
-                  <a:srgbClr val="94A3B8"/>
-                </a:solidFill>
-                <a:latin typeface="Calibri" pitchFamily="34" charset="0"/>
-                <a:ea typeface="Calibri" pitchFamily="34" charset="-122"/>
-                <a:cs typeface="Calibri" pitchFamily="34" charset="-120"/>
-              </a:rPr>
-              <a:t>All running in a single vkCmdDispatch. No CPU round-trips. GPU-driven scheduling via CAS atomics.</a:t>
-            </a:r>
-            <a:endParaRPr lang="en-US" sz="1200" dirty="0"/>
-          </a:p>
-        </p:txBody>
-      </p:sp>
-    </p:spTree>
-  </p:cSld>
-  <p:clrMapOvr>
-    <a:masterClrMapping/>
-  </p:clrMapOvr>
-</p:sld>
-</file>
-
-<file path=ppt/slides/slide11.xml><?xml version="1.0" encoding="utf-8"?>
-<p:sld xmlns:a="http://schemas.openxmlformats.org/drawingml/2006/main" xmlns:r="http://schemas.openxmlformats.org/officeDocument/2006/relationships" xmlns:p="http://schemas.openxmlformats.org/presentationml/2006/main">
   <p:cSld name="Slide 11">
     <p:bg>
       <p:bgPr>
@@ -3892,7 +2890,7 @@
 </p:sld>
 </file>
 
-<file path=ppt/slides/slide12.xml><?xml version="1.0" encoding="utf-8"?>
+<file path=ppt/slides/slide11.xml><?xml version="1.0" encoding="utf-8"?>
 <p:sld xmlns:a="http://schemas.openxmlformats.org/drawingml/2006/main" xmlns:r="http://schemas.openxmlformats.org/officeDocument/2006/relationships" xmlns:p="http://schemas.openxmlformats.org/presentationml/2006/main">
   <p:cSld name="Slide 12">
     <p:bg>
@@ -4452,7 +3450,7 @@
                 <a:ea typeface="Calibri" pitchFamily="34" charset="-122"/>
                 <a:cs typeface="Calibri" pitchFamily="34" charset="-120"/>
               </a:rPr>
-              <a:t>All Queues in Global Memory</a:t>
+              <a:t>Global Queue Bottleneck</a:t>
             </a:r>
             <a:endParaRPr lang="en-US" sz="1400" dirty="0"/>
           </a:p>
@@ -4491,7 +3489,7 @@
                 <a:ea typeface="Calibri" pitchFamily="34" charset="-122"/>
                 <a:cs typeface="Calibri" pitchFamily="34" charset="-120"/>
               </a:rPr>
-              <a:t>Both queues live in SSBO. Latency is 10-100x higher than LDS. Core validation target for Phase 4.</a:t>
+              <a:t>Queues live in SSBO. Need to measure whether producer-consumer handoff is limited by global memory traffic and contention.</a:t>
             </a:r>
             <a:endParaRPr lang="en-US" sz="1100" dirty="0"/>
           </a:p>
@@ -4837,7 +3835,7 @@
 </p:sld>
 </file>
 
-<file path=ppt/slides/slide13.xml><?xml version="1.0" encoding="utf-8"?>
+<file path=ppt/slides/slide12.xml><?xml version="1.0" encoding="utf-8"?>
 <p:sld xmlns:a="http://schemas.openxmlformats.org/drawingml/2006/main" xmlns:r="http://schemas.openxmlformats.org/officeDocument/2006/relationships" xmlns:p="http://schemas.openxmlformats.org/presentationml/2006/main">
   <p:cSld name="Slide 13">
     <p:bg>
@@ -5234,7 +4232,7 @@
                 <a:ea typeface="Calibri" pitchFamily="34" charset="-122"/>
                 <a:cs typeface="Calibri" pitchFamily="34" charset="-120"/>
               </a:rPr>
-              <a:t>Phase 4 — LDS Queue</a:t>
+              <a:t>Phase 4 — Bottleneck Localization</a:t>
             </a:r>
             <a:endParaRPr lang="en-US" sz="1500" dirty="0"/>
           </a:p>
@@ -5274,7 +4272,9 @@
                 <a:ea typeface="Calibri" pitchFamily="34" charset="-122"/>
                 <a:cs typeface="Calibri" pitchFamily="34" charset="-120"/>
               </a:rPr>
-              <a:t>Move Task Queue to shared memory (LDS)</a:t>
+              <a:t>用 LDS / local queue 驗證 producer-consumer 是否卡在 global memory traffic
+比較 SSBO vs LDS queue 的 throughput / retry
+產出瓶頸歸因與 optimization 方向</a:t>
             </a:r>
             <a:endParaRPr lang="en-US" sz="1100" dirty="0"/>
           </a:p>
@@ -5292,7 +4292,7 @@
                 <a:ea typeface="Calibri" pitchFamily="34" charset="-122"/>
                 <a:cs typeface="Calibri" pitchFamily="34" charset="-120"/>
               </a:rPr>
-              <a:t>Measure LDS vs SSBO throughput gap</a:t>
+              <a:t/>
             </a:r>
             <a:endParaRPr lang="en-US" sz="1100" dirty="0"/>
           </a:p>
@@ -5310,7 +4310,7 @@
                 <a:ea typeface="Calibri" pitchFamily="34" charset="-122"/>
                 <a:cs typeface="Calibri" pitchFamily="34" charset="-120"/>
               </a:rPr>
-              <a:t>Validate: persistent thread + LDS &lt; execute indirect latency?</a:t>
+              <a:t/>
             </a:r>
             <a:endParaRPr lang="en-US" sz="1100" dirty="0"/>
           </a:p>
@@ -5678,7 +4678,7 @@
 </p:sld>
 </file>
 
-<file path=ppt/slides/slide14.xml><?xml version="1.0" encoding="utf-8"?>
+<file path=ppt/slides/slide13.xml><?xml version="1.0" encoding="utf-8"?>
 <p:sld xmlns:a="http://schemas.openxmlformats.org/drawingml/2006/main" xmlns:r="http://schemas.openxmlformats.org/officeDocument/2006/relationships" xmlns:p="http://schemas.openxmlformats.org/presentationml/2006/main">
   <p:cSld name="Slide 14">
     <p:bg>
@@ -5925,7 +4925,7 @@
                 <a:ea typeface="Arial Black" pitchFamily="34" charset="-122"/>
                 <a:cs typeface="Arial Black" pitchFamily="34" charset="-120"/>
               </a:rPr>
-              <a:t>Research Goals</a:t>
+              <a:t>研究定位（更正版）</a:t>
             </a:r>
             <a:endParaRPr lang="en-US" sz="2800" dirty="0"/>
           </a:p>
@@ -6011,7 +5011,7 @@
                 <a:ea typeface="Arial Black" pitchFamily="34" charset="-122"/>
                 <a:cs typeface="Arial Black" pitchFamily="34" charset="-120"/>
               </a:rPr>
-              <a:t>GOAL 1</a:t>
+              <a:t>定位</a:t>
             </a:r>
             <a:endParaRPr lang="en-US" sz="1300" dirty="0"/>
           </a:p>
@@ -6050,7 +5050,7 @@
                 <a:ea typeface="Calibri" pitchFamily="34" charset="-122"/>
                 <a:cs typeface="Calibri" pitchFamily="34" charset="-120"/>
               </a:rPr>
-              <a:t>Understand Persistent Thread Overhead</a:t>
+              <a:t>Software producer-consumer</a:t>
             </a:r>
             <a:endParaRPr lang="en-US" sz="1800" dirty="0"/>
           </a:p>
@@ -6089,7 +5089,7 @@
                 <a:ea typeface="Calibri" pitchFamily="34" charset="-122"/>
                 <a:cs typeface="Calibri" pitchFamily="34" charset="-120"/>
               </a:rPr>
-              <a:t>Identify scheduling overhead in persistent kernel mode: atomic contention, memory barrier cost, thread spin-wait cycles.</a:t>
+              <a:t>Software producer-consumer 做到盡可能快；用 profiling / metrics 找瓶頸，提出 optimization 方向。</a:t>
             </a:r>
             <a:endParaRPr lang="en-US" sz="1300" dirty="0"/>
           </a:p>
@@ -6175,7 +5175,7 @@
                 <a:ea typeface="Arial Black" pitchFamily="34" charset="-122"/>
                 <a:cs typeface="Arial Black" pitchFamily="34" charset="-120"/>
               </a:rPr>
-              <a:t>GOAL 2</a:t>
+              <a:t>意義</a:t>
             </a:r>
             <a:endParaRPr lang="en-US" sz="1300" dirty="0"/>
           </a:p>
@@ -6214,7 +5214,7 @@
                 <a:ea typeface="Calibri" pitchFamily="34" charset="-122"/>
                 <a:cs typeface="Calibri" pitchFamily="34" charset="-120"/>
               </a:rPr>
-              <a:t>Measure On-Chip Memory Utilization</a:t>
+              <a:t>給 MTK 的 mobile 優化依據</a:t>
             </a:r>
             <a:endParaRPr lang="en-US" sz="1800" dirty="0"/>
           </a:p>
@@ -6253,7 +5253,7 @@
                 <a:ea typeface="Calibri" pitchFamily="34" charset="-122"/>
                 <a:cs typeface="Calibri" pitchFamily="34" charset="-120"/>
               </a:rPr>
-              <a:t>Compare persistent thread with LDS (shared memory) vs. execute indirect with global memory. Validate whether persistent threads can lower scheduling latency through on-chip resources.</a:t>
+              <a:t>讓 MTK 預先知道 mobile GPU 的瓶頸：atomic contention、global memory traffic、queue pressure、role imbalance、memory visibility、spin-wait。</a:t>
             </a:r>
             <a:endParaRPr lang="en-US" sz="1300" dirty="0"/>
           </a:p>
@@ -7207,711 +6207,6 @@
 
 <file path=ppt/slides/slide4.xml><?xml version="1.0" encoding="utf-8"?>
 <p:sld xmlns:a="http://schemas.openxmlformats.org/drawingml/2006/main" xmlns:r="http://schemas.openxmlformats.org/officeDocument/2006/relationships" xmlns:p="http://schemas.openxmlformats.org/presentationml/2006/main">
-  <p:cSld name="Slide 4">
-    <p:bg>
-      <p:bgPr>
-        <a:solidFill>
-          <a:srgbClr val="0A1628"/>
-        </a:solidFill>
-      </p:bgPr>
-    </p:bg>
-    <p:spTree>
-      <p:nvGrpSpPr>
-        <p:cNvPr id="1" name=""/>
-        <p:cNvGrpSpPr/>
-        <p:nvPr/>
-      </p:nvGrpSpPr>
-      <p:grpSpPr>
-        <a:xfrm>
-          <a:off x="0" y="0"/>
-          <a:ext cx="0" cy="0"/>
-          <a:chOff x="0" y="0"/>
-          <a:chExt cx="0" cy="0"/>
-        </a:xfrm>
-      </p:grpSpPr>
-      <p:sp>
-        <p:nvSpPr>
-          <p:cNvPr id="2" name="Shape 0"/>
-          <p:cNvSpPr/>
-          <p:nvPr/>
-        </p:nvSpPr>
-        <p:spPr>
-          <a:xfrm>
-            <a:off x="0" y="0"/>
-            <a:ext cx="9144000" cy="54864"/>
-          </a:xfrm>
-          <a:prstGeom prst="rect">
-            <a:avLst/>
-          </a:prstGeom>
-          <a:solidFill>
-            <a:srgbClr val="0D9488"/>
-          </a:solidFill>
-          <a:ln/>
-        </p:spPr>
-      </p:sp>
-      <p:sp>
-        <p:nvSpPr>
-          <p:cNvPr id="3" name="Text 1"/>
-          <p:cNvSpPr/>
-          <p:nvPr/>
-        </p:nvSpPr>
-        <p:spPr>
-          <a:xfrm>
-            <a:off x="640080" y="320040"/>
-            <a:ext cx="8229600" cy="548640"/>
-          </a:xfrm>
-          <a:prstGeom prst="rect">
-            <a:avLst/>
-          </a:prstGeom>
-          <a:noFill/>
-          <a:ln/>
-        </p:spPr>
-        <p:txBody>
-          <a:bodyPr wrap="square" lIns="0" tIns="0" rIns="0" bIns="0" rtlCol="0" anchor="ctr"/>
-          <a:lstStyle/>
-          <a:p>
-            <a:pPr indent="0" marL="0">
-              <a:buNone/>
-            </a:pPr>
-            <a:r>
-              <a:rPr lang="en-US" sz="2400" dirty="0">
-                <a:solidFill>
-                  <a:srgbClr val="FFFFFF"/>
-                </a:solidFill>
-                <a:latin typeface="Arial Black" pitchFamily="34" charset="0"/>
-                <a:ea typeface="Arial Black" pitchFamily="34" charset="-122"/>
-                <a:cs typeface="Arial Black" pitchFamily="34" charset="-120"/>
-              </a:rPr>
-              <a:t>Phase 1: Setup &amp; Architecture</a:t>
-            </a:r>
-            <a:endParaRPr lang="en-US" sz="2400" dirty="0"/>
-          </a:p>
-        </p:txBody>
-      </p:sp>
-      <p:sp>
-        <p:nvSpPr>
-          <p:cNvPr id="4" name="Shape 2"/>
-          <p:cNvSpPr/>
-          <p:nvPr/>
-        </p:nvSpPr>
-        <p:spPr>
-          <a:xfrm>
-            <a:off x="640080" y="1051560"/>
-            <a:ext cx="3931920" cy="3657600"/>
-          </a:xfrm>
-          <a:prstGeom prst="rect">
-            <a:avLst/>
-          </a:prstGeom>
-          <a:solidFill>
-            <a:srgbClr val="1A2D4D"/>
-          </a:solidFill>
-          <a:ln/>
-          <a:effectLst>
-            <a:outerShdw sx="100000" sy="100000" kx="0" ky="0" algn="bl" rotWithShape="0" blurRad="101600" dist="38100" dir="8100000">
-              <a:srgbClr val="000000">
-                <a:alpha val="20000"/>
-              </a:srgbClr>
-            </a:outerShdw>
-          </a:effectLst>
-        </p:spPr>
-      </p:sp>
-      <p:sp>
-        <p:nvSpPr>
-          <p:cNvPr id="5" name="Shape 3"/>
-          <p:cNvSpPr/>
-          <p:nvPr/>
-        </p:nvSpPr>
-        <p:spPr>
-          <a:xfrm>
-            <a:off x="640080" y="1051560"/>
-            <a:ext cx="64008" cy="3657600"/>
-          </a:xfrm>
-          <a:prstGeom prst="rect">
-            <a:avLst/>
-          </a:prstGeom>
-          <a:solidFill>
-            <a:srgbClr val="0D9488"/>
-          </a:solidFill>
-          <a:ln/>
-        </p:spPr>
-      </p:sp>
-      <p:sp>
-        <p:nvSpPr>
-          <p:cNvPr id="6" name="Text 4"/>
-          <p:cNvSpPr/>
-          <p:nvPr/>
-        </p:nvSpPr>
-        <p:spPr>
-          <a:xfrm>
-            <a:off x="960120" y="1188720"/>
-            <a:ext cx="2743200" cy="320040"/>
-          </a:xfrm>
-          <a:prstGeom prst="rect">
-            <a:avLst/>
-          </a:prstGeom>
-          <a:noFill/>
-          <a:ln/>
-        </p:spPr>
-        <p:txBody>
-          <a:bodyPr wrap="square" lIns="0" tIns="0" rIns="0" bIns="0" rtlCol="0" anchor="ctr"/>
-          <a:lstStyle/>
-          <a:p>
-            <a:pPr indent="0" marL="0">
-              <a:buNone/>
-            </a:pPr>
-            <a:r>
-              <a:rPr lang="en-US" sz="1600" dirty="0">
-                <a:solidFill>
-                  <a:srgbClr val="14B8A6"/>
-                </a:solidFill>
-                <a:latin typeface="Arial Black" pitchFamily="34" charset="0"/>
-                <a:ea typeface="Arial Black" pitchFamily="34" charset="-122"/>
-                <a:cs typeface="Arial Black" pitchFamily="34" charset="-120"/>
-              </a:rPr>
-              <a:t>Design Decisions</a:t>
-            </a:r>
-            <a:endParaRPr lang="en-US" sz="1600" dirty="0"/>
-          </a:p>
-        </p:txBody>
-      </p:sp>
-      <p:sp>
-        <p:nvSpPr>
-          <p:cNvPr id="7" name="Text 5"/>
-          <p:cNvSpPr/>
-          <p:nvPr/>
-        </p:nvSpPr>
-        <p:spPr>
-          <a:xfrm>
-            <a:off x="960120" y="1600200"/>
-            <a:ext cx="3383280" cy="2926080"/>
-          </a:xfrm>
-          <a:prstGeom prst="rect">
-            <a:avLst/>
-          </a:prstGeom>
-          <a:noFill/>
-          <a:ln/>
-        </p:spPr>
-        <p:txBody>
-          <a:bodyPr wrap="square" lIns="0" tIns="0" rIns="0" bIns="0" rtlCol="0" anchor="ctr"/>
-          <a:lstStyle/>
-          <a:p>
-            <a:pPr indent="0" marL="0">
-              <a:lnSpc>
-                <a:spcPct val="115000"/>
-              </a:lnSpc>
-              <a:buNone/>
-            </a:pPr>
-            <a:r>
-              <a:rPr lang="en-US" sz="1400" b="1" dirty="0">
-                <a:solidFill>
-                  <a:srgbClr val="FFFFFF"/>
-                </a:solidFill>
-                <a:latin typeface="Calibri" pitchFamily="34" charset="0"/>
-                <a:ea typeface="Calibri" pitchFamily="34" charset="-122"/>
-                <a:cs typeface="Calibri" pitchFamily="34" charset="-120"/>
-              </a:rPr>
-              <a:t>No VulkanExampleBase inheritance</a:t>
-            </a:r>
-            <a:endParaRPr lang="en-US" sz="1400" dirty="0"/>
-          </a:p>
-          <a:p>
-            <a:pPr indent="0" marL="0">
-              <a:lnSpc>
-                <a:spcPct val="115000"/>
-              </a:lnSpc>
-              <a:buNone/>
-            </a:pPr>
-            <a:r>
-              <a:rPr lang="en-US" sz="1200" dirty="0">
-                <a:solidFill>
-                  <a:srgbClr val="94A3B8"/>
-                </a:solidFill>
-                <a:latin typeface="Calibri" pitchFamily="34" charset="0"/>
-                <a:ea typeface="Calibri" pitchFamily="34" charset="-122"/>
-                <a:cs typeface="Calibri" pitchFamily="34" charset="-120"/>
-              </a:rPr>
-              <a:t>Headless compute only — no swapchain, render pass, or framebuffer needed. Clean path for benchmarking.</a:t>
-            </a:r>
-            <a:endParaRPr lang="en-US" sz="1400" dirty="0"/>
-          </a:p>
-          <a:p>
-            <a:pPr indent="0" marL="0">
-              <a:lnSpc>
-                <a:spcPct val="115000"/>
-              </a:lnSpc>
-              <a:buNone/>
-            </a:pPr>
-            <a:endParaRPr lang="en-US" sz="1400" dirty="0"/>
-          </a:p>
-          <a:p>
-            <a:pPr indent="0" marL="0">
-              <a:lnSpc>
-                <a:spcPct val="115000"/>
-              </a:lnSpc>
-              <a:buNone/>
-            </a:pPr>
-            <a:r>
-              <a:rPr lang="en-US" sz="1400" b="1" dirty="0">
-                <a:solidFill>
-                  <a:srgbClr val="FFFFFF"/>
-                </a:solidFill>
-                <a:latin typeface="Calibri" pitchFamily="34" charset="0"/>
-                <a:ea typeface="Calibri" pitchFamily="34" charset="-122"/>
-                <a:cs typeface="Calibri" pitchFamily="34" charset="-120"/>
-              </a:rPr>
-              <a:t>Standalone CMake Target</a:t>
-            </a:r>
-            <a:endParaRPr lang="en-US" sz="1400" dirty="0"/>
-          </a:p>
-          <a:p>
-            <a:pPr indent="0" marL="0">
-              <a:lnSpc>
-                <a:spcPct val="115000"/>
-              </a:lnSpc>
-              <a:buNone/>
-            </a:pPr>
-            <a:r>
-              <a:rPr lang="en-US" sz="1200" dirty="0">
-                <a:solidFill>
-                  <a:srgbClr val="94A3B8"/>
-                </a:solidFill>
-                <a:latin typeface="Calibri" pitchFamily="34" charset="0"/>
-                <a:ea typeface="Calibri" pitchFamily="34" charset="-122"/>
-                <a:cs typeface="Calibri" pitchFamily="34" charset="-120"/>
-              </a:rPr>
-              <a:t>cmake --build build --target workgraph_poc</a:t>
-            </a:r>
-            <a:endParaRPr lang="en-US" sz="1400" dirty="0"/>
-          </a:p>
-          <a:p>
-            <a:pPr indent="0" marL="0">
-              <a:lnSpc>
-                <a:spcPct val="115000"/>
-              </a:lnSpc>
-              <a:buNone/>
-            </a:pPr>
-            <a:endParaRPr lang="en-US" sz="1400" dirty="0"/>
-          </a:p>
-          <a:p>
-            <a:pPr indent="0" marL="0">
-              <a:lnSpc>
-                <a:spcPct val="115000"/>
-              </a:lnSpc>
-              <a:buNone/>
-            </a:pPr>
-            <a:r>
-              <a:rPr lang="en-US" sz="1400" b="1" dirty="0">
-                <a:solidFill>
-                  <a:srgbClr val="FFFFFF"/>
-                </a:solidFill>
-                <a:latin typeface="Calibri" pitchFamily="34" charset="0"/>
-                <a:ea typeface="Calibri" pitchFamily="34" charset="-122"/>
-                <a:cs typeface="Calibri" pitchFamily="34" charset="-120"/>
-              </a:rPr>
-              <a:t>Manual SPIR-V Compilation</a:t>
-            </a:r>
-            <a:endParaRPr lang="en-US" sz="1400" dirty="0"/>
-          </a:p>
-          <a:p>
-            <a:pPr indent="0" marL="0">
-              <a:lnSpc>
-                <a:spcPct val="115000"/>
-              </a:lnSpc>
-              <a:buNone/>
-            </a:pPr>
-            <a:r>
-              <a:rPr lang="en-US" sz="1200" dirty="0">
-                <a:solidFill>
-                  <a:srgbClr val="94A3B8"/>
-                </a:solidFill>
-                <a:latin typeface="Calibri" pitchFamily="34" charset="0"/>
-                <a:ea typeface="Calibri" pitchFamily="34" charset="-122"/>
-                <a:cs typeface="Calibri" pitchFamily="34" charset="-120"/>
-              </a:rPr>
-              <a:t>glslangValidator -&gt; .spv committed alongside GLSL source</a:t>
-            </a:r>
-            <a:endParaRPr lang="en-US" sz="1400" dirty="0"/>
-          </a:p>
-        </p:txBody>
-      </p:sp>
-      <p:sp>
-        <p:nvSpPr>
-          <p:cNvPr id="8" name="Shape 6"/>
-          <p:cNvSpPr/>
-          <p:nvPr/>
-        </p:nvSpPr>
-        <p:spPr>
-          <a:xfrm>
-            <a:off x="4846320" y="1051560"/>
-            <a:ext cx="3931920" cy="3657600"/>
-          </a:xfrm>
-          <a:prstGeom prst="rect">
-            <a:avLst/>
-          </a:prstGeom>
-          <a:solidFill>
-            <a:srgbClr val="1A2D4D"/>
-          </a:solidFill>
-          <a:ln/>
-          <a:effectLst>
-            <a:outerShdw sx="100000" sy="100000" kx="0" ky="0" algn="bl" rotWithShape="0" blurRad="101600" dist="38100" dir="8100000">
-              <a:srgbClr val="000000">
-                <a:alpha val="20000"/>
-              </a:srgbClr>
-            </a:outerShdw>
-          </a:effectLst>
-        </p:spPr>
-      </p:sp>
-      <p:sp>
-        <p:nvSpPr>
-          <p:cNvPr id="9" name="Shape 7"/>
-          <p:cNvSpPr/>
-          <p:nvPr/>
-        </p:nvSpPr>
-        <p:spPr>
-          <a:xfrm>
-            <a:off x="4846320" y="1051560"/>
-            <a:ext cx="64008" cy="3657600"/>
-          </a:xfrm>
-          <a:prstGeom prst="rect">
-            <a:avLst/>
-          </a:prstGeom>
-          <a:solidFill>
-            <a:srgbClr val="06B6D4"/>
-          </a:solidFill>
-          <a:ln/>
-        </p:spPr>
-      </p:sp>
-      <p:sp>
-        <p:nvSpPr>
-          <p:cNvPr id="10" name="Text 8"/>
-          <p:cNvSpPr/>
-          <p:nvPr/>
-        </p:nvSpPr>
-        <p:spPr>
-          <a:xfrm>
-            <a:off x="5166360" y="1188720"/>
-            <a:ext cx="2743200" cy="320040"/>
-          </a:xfrm>
-          <a:prstGeom prst="rect">
-            <a:avLst/>
-          </a:prstGeom>
-          <a:noFill/>
-          <a:ln/>
-        </p:spPr>
-        <p:txBody>
-          <a:bodyPr wrap="square" lIns="0" tIns="0" rIns="0" bIns="0" rtlCol="0" anchor="ctr"/>
-          <a:lstStyle/>
-          <a:p>
-            <a:pPr indent="0" marL="0">
-              <a:buNone/>
-            </a:pPr>
-            <a:r>
-              <a:rPr lang="en-US" sz="1600" dirty="0">
-                <a:solidFill>
-                  <a:srgbClr val="06B6D4"/>
-                </a:solidFill>
-                <a:latin typeface="Arial Black" pitchFamily="34" charset="0"/>
-                <a:ea typeface="Arial Black" pitchFamily="34" charset="-122"/>
-                <a:cs typeface="Arial Black" pitchFamily="34" charset="-120"/>
-              </a:rPr>
-              <a:t>Vulkan Object Chain</a:t>
-            </a:r>
-            <a:endParaRPr lang="en-US" sz="1600" dirty="0"/>
-          </a:p>
-        </p:txBody>
-      </p:sp>
-      <p:sp>
-        <p:nvSpPr>
-          <p:cNvPr id="11" name="Text 9"/>
-          <p:cNvSpPr/>
-          <p:nvPr/>
-        </p:nvSpPr>
-        <p:spPr>
-          <a:xfrm>
-            <a:off x="5166360" y="1600200"/>
-            <a:ext cx="3383280" cy="2926080"/>
-          </a:xfrm>
-          <a:prstGeom prst="rect">
-            <a:avLst/>
-          </a:prstGeom>
-          <a:noFill/>
-          <a:ln/>
-        </p:spPr>
-        <p:txBody>
-          <a:bodyPr wrap="square" lIns="0" tIns="0" rIns="0" bIns="0" rtlCol="0" anchor="ctr"/>
-          <a:lstStyle/>
-          <a:p>
-            <a:pPr indent="0" marL="0">
-              <a:lnSpc>
-                <a:spcPct val="130000"/>
-              </a:lnSpc>
-              <a:buNone/>
-            </a:pPr>
-            <a:r>
-              <a:rPr lang="en-US" sz="1100" dirty="0">
-                <a:solidFill>
-                  <a:srgbClr val="94A3B8"/>
-                </a:solidFill>
-                <a:latin typeface="Consolas" pitchFamily="34" charset="0"/>
-                <a:ea typeface="Consolas" pitchFamily="34" charset="-122"/>
-                <a:cs typeface="Consolas" pitchFamily="34" charset="-120"/>
-              </a:rPr>
-              <a:t>VkInstance (Vulkan 1.1)</a:t>
-            </a:r>
-            <a:endParaRPr lang="en-US" sz="1100" dirty="0"/>
-          </a:p>
-          <a:p>
-            <a:pPr indent="0" marL="0">
-              <a:lnSpc>
-                <a:spcPct val="130000"/>
-              </a:lnSpc>
-              <a:buNone/>
-            </a:pPr>
-            <a:r>
-              <a:rPr lang="en-US" sz="1100" dirty="0">
-                <a:solidFill>
-                  <a:srgbClr val="94A3B8"/>
-                </a:solidFill>
-                <a:latin typeface="Consolas" pitchFamily="34" charset="0"/>
-                <a:ea typeface="Consolas" pitchFamily="34" charset="-122"/>
-                <a:cs typeface="Consolas" pitchFamily="34" charset="-120"/>
-              </a:rPr>
-              <a:t>    ↓</a:t>
-            </a:r>
-            <a:endParaRPr lang="en-US" sz="1100" dirty="0"/>
-          </a:p>
-          <a:p>
-            <a:pPr indent="0" marL="0">
-              <a:lnSpc>
-                <a:spcPct val="130000"/>
-              </a:lnSpc>
-              <a:buNone/>
-            </a:pPr>
-            <a:r>
-              <a:rPr lang="en-US" sz="1100" dirty="0">
-                <a:solidFill>
-                  <a:srgbClr val="94A3B8"/>
-                </a:solidFill>
-                <a:latin typeface="Consolas" pitchFamily="34" charset="0"/>
-                <a:ea typeface="Consolas" pitchFamily="34" charset="-122"/>
-                <a:cs typeface="Consolas" pitchFamily="34" charset="-120"/>
-              </a:rPr>
-              <a:t>VkPhysicalDevice (RX 7900 XTX)</a:t>
-            </a:r>
-            <a:endParaRPr lang="en-US" sz="1100" dirty="0"/>
-          </a:p>
-          <a:p>
-            <a:pPr indent="0" marL="0">
-              <a:lnSpc>
-                <a:spcPct val="130000"/>
-              </a:lnSpc>
-              <a:buNone/>
-            </a:pPr>
-            <a:r>
-              <a:rPr lang="en-US" sz="1100" dirty="0">
-                <a:solidFill>
-                  <a:srgbClr val="94A3B8"/>
-                </a:solidFill>
-                <a:latin typeface="Consolas" pitchFamily="34" charset="0"/>
-                <a:ea typeface="Consolas" pitchFamily="34" charset="-122"/>
-                <a:cs typeface="Consolas" pitchFamily="34" charset="-120"/>
-              </a:rPr>
-              <a:t>    ↓</a:t>
-            </a:r>
-            <a:endParaRPr lang="en-US" sz="1100" dirty="0"/>
-          </a:p>
-          <a:p>
-            <a:pPr indent="0" marL="0">
-              <a:lnSpc>
-                <a:spcPct val="130000"/>
-              </a:lnSpc>
-              <a:buNone/>
-            </a:pPr>
-            <a:r>
-              <a:rPr lang="en-US" sz="1100" dirty="0">
-                <a:solidFill>
-                  <a:srgbClr val="94A3B8"/>
-                </a:solidFill>
-                <a:latin typeface="Consolas" pitchFamily="34" charset="0"/>
-                <a:ea typeface="Consolas" pitchFamily="34" charset="-122"/>
-                <a:cs typeface="Consolas" pitchFamily="34" charset="-120"/>
-              </a:rPr>
-              <a:t>VkDevice + Compute Queue</a:t>
-            </a:r>
-            <a:endParaRPr lang="en-US" sz="1100" dirty="0"/>
-          </a:p>
-          <a:p>
-            <a:pPr indent="0" marL="0">
-              <a:lnSpc>
-                <a:spcPct val="130000"/>
-              </a:lnSpc>
-              <a:buNone/>
-            </a:pPr>
-            <a:r>
-              <a:rPr lang="en-US" sz="1100" dirty="0">
-                <a:solidFill>
-                  <a:srgbClr val="94A3B8"/>
-                </a:solidFill>
-                <a:latin typeface="Consolas" pitchFamily="34" charset="0"/>
-                <a:ea typeface="Consolas" pitchFamily="34" charset="-122"/>
-                <a:cs typeface="Consolas" pitchFamily="34" charset="-120"/>
-              </a:rPr>
-              <a:t>    ↓</a:t>
-            </a:r>
-            <a:endParaRPr lang="en-US" sz="1100" dirty="0"/>
-          </a:p>
-          <a:p>
-            <a:pPr indent="0" marL="0">
-              <a:lnSpc>
-                <a:spcPct val="130000"/>
-              </a:lnSpc>
-              <a:buNone/>
-            </a:pPr>
-            <a:r>
-              <a:rPr lang="en-US" sz="1100" dirty="0">
-                <a:solidFill>
-                  <a:srgbClr val="94A3B8"/>
-                </a:solidFill>
-                <a:latin typeface="Consolas" pitchFamily="34" charset="0"/>
-                <a:ea typeface="Consolas" pitchFamily="34" charset="-122"/>
-                <a:cs typeface="Consolas" pitchFamily="34" charset="-120"/>
-              </a:rPr>
-              <a:t>CommandPool + CommandBuffer</a:t>
-            </a:r>
-            <a:endParaRPr lang="en-US" sz="1100" dirty="0"/>
-          </a:p>
-          <a:p>
-            <a:pPr indent="0" marL="0">
-              <a:lnSpc>
-                <a:spcPct val="130000"/>
-              </a:lnSpc>
-              <a:buNone/>
-            </a:pPr>
-            <a:r>
-              <a:rPr lang="en-US" sz="1100" dirty="0">
-                <a:solidFill>
-                  <a:srgbClr val="94A3B8"/>
-                </a:solidFill>
-                <a:latin typeface="Consolas" pitchFamily="34" charset="0"/>
-                <a:ea typeface="Consolas" pitchFamily="34" charset="-122"/>
-                <a:cs typeface="Consolas" pitchFamily="34" charset="-120"/>
-              </a:rPr>
-              <a:t>    ↓</a:t>
-            </a:r>
-            <a:endParaRPr lang="en-US" sz="1100" dirty="0"/>
-          </a:p>
-          <a:p>
-            <a:pPr indent="0" marL="0">
-              <a:lnSpc>
-                <a:spcPct val="130000"/>
-              </a:lnSpc>
-              <a:buNone/>
-            </a:pPr>
-            <a:r>
-              <a:rPr lang="en-US" sz="1100" dirty="0">
-                <a:solidFill>
-                  <a:srgbClr val="94A3B8"/>
-                </a:solidFill>
-                <a:latin typeface="Consolas" pitchFamily="34" charset="0"/>
-                <a:ea typeface="Consolas" pitchFamily="34" charset="-122"/>
-                <a:cs typeface="Consolas" pitchFamily="34" charset="-120"/>
-              </a:rPr>
-              <a:t>3x SSBO (Control + Q1 + Q2)</a:t>
-            </a:r>
-            <a:endParaRPr lang="en-US" sz="1100" dirty="0"/>
-          </a:p>
-          <a:p>
-            <a:pPr indent="0" marL="0">
-              <a:lnSpc>
-                <a:spcPct val="130000"/>
-              </a:lnSpc>
-              <a:buNone/>
-            </a:pPr>
-            <a:r>
-              <a:rPr lang="en-US" sz="1100" dirty="0">
-                <a:solidFill>
-                  <a:srgbClr val="94A3B8"/>
-                </a:solidFill>
-                <a:latin typeface="Consolas" pitchFamily="34" charset="0"/>
-                <a:ea typeface="Consolas" pitchFamily="34" charset="-122"/>
-                <a:cs typeface="Consolas" pitchFamily="34" charset="-120"/>
-              </a:rPr>
-              <a:t>    ↓</a:t>
-            </a:r>
-            <a:endParaRPr lang="en-US" sz="1100" dirty="0"/>
-          </a:p>
-          <a:p>
-            <a:pPr indent="0" marL="0">
-              <a:lnSpc>
-                <a:spcPct val="130000"/>
-              </a:lnSpc>
-              <a:buNone/>
-            </a:pPr>
-            <a:r>
-              <a:rPr lang="en-US" sz="1100" dirty="0">
-                <a:solidFill>
-                  <a:srgbClr val="94A3B8"/>
-                </a:solidFill>
-                <a:latin typeface="Consolas" pitchFamily="34" charset="0"/>
-                <a:ea typeface="Consolas" pitchFamily="34" charset="-122"/>
-                <a:cs typeface="Consolas" pitchFamily="34" charset="-120"/>
-              </a:rPr>
-              <a:t>DescriptorSet (binding 0/1/2)</a:t>
-            </a:r>
-            <a:endParaRPr lang="en-US" sz="1100" dirty="0"/>
-          </a:p>
-          <a:p>
-            <a:pPr indent="0" marL="0">
-              <a:lnSpc>
-                <a:spcPct val="130000"/>
-              </a:lnSpc>
-              <a:buNone/>
-            </a:pPr>
-            <a:r>
-              <a:rPr lang="en-US" sz="1100" dirty="0">
-                <a:solidFill>
-                  <a:srgbClr val="94A3B8"/>
-                </a:solidFill>
-                <a:latin typeface="Consolas" pitchFamily="34" charset="0"/>
-                <a:ea typeface="Consolas" pitchFamily="34" charset="-122"/>
-                <a:cs typeface="Consolas" pitchFamily="34" charset="-120"/>
-              </a:rPr>
-              <a:t>    ↓</a:t>
-            </a:r>
-            <a:endParaRPr lang="en-US" sz="1100" dirty="0"/>
-          </a:p>
-          <a:p>
-            <a:pPr indent="0" marL="0">
-              <a:lnSpc>
-                <a:spcPct val="130000"/>
-              </a:lnSpc>
-              <a:buNone/>
-            </a:pPr>
-            <a:r>
-              <a:rPr lang="en-US" sz="1100" dirty="0">
-                <a:solidFill>
-                  <a:srgbClr val="94A3B8"/>
-                </a:solidFill>
-                <a:latin typeface="Consolas" pitchFamily="34" charset="0"/>
-                <a:ea typeface="Consolas" pitchFamily="34" charset="-122"/>
-                <a:cs typeface="Consolas" pitchFamily="34" charset="-120"/>
-              </a:rPr>
-              <a:t>Compute Pipeline + Dispatch</a:t>
-            </a:r>
-            <a:endParaRPr lang="en-US" sz="1100" dirty="0"/>
-          </a:p>
-        </p:txBody>
-      </p:sp>
-    </p:spTree>
-  </p:cSld>
-  <p:clrMapOvr>
-    <a:masterClrMapping/>
-  </p:clrMapOvr>
-</p:sld>
-</file>
-
-<file path=ppt/slides/slide5.xml><?xml version="1.0" encoding="utf-8"?>
-<p:sld xmlns:a="http://schemas.openxmlformats.org/drawingml/2006/main" xmlns:r="http://schemas.openxmlformats.org/officeDocument/2006/relationships" xmlns:p="http://schemas.openxmlformats.org/presentationml/2006/main">
   <p:cSld name="Slide 5">
     <p:bg>
       <p:bgPr>
@@ -9204,7 +7499,7 @@
 </p:sld>
 </file>
 
-<file path=ppt/slides/slide6.xml><?xml version="1.0" encoding="utf-8"?>
+<file path=ppt/slides/slide5.xml><?xml version="1.0" encoding="utf-8"?>
 <p:sld xmlns:a="http://schemas.openxmlformats.org/drawingml/2006/main" xmlns:r="http://schemas.openxmlformats.org/officeDocument/2006/relationships" xmlns:p="http://schemas.openxmlformats.org/presentationml/2006/main">
   <p:cSld name="Slide 6">
     <p:bg>
@@ -10285,7 +8580,7 @@
 </p:sld>
 </file>
 
-<file path=ppt/slides/slide7.xml><?xml version="1.0" encoding="utf-8"?>
+<file path=ppt/slides/slide6.xml><?xml version="1.0" encoding="utf-8"?>
 <p:sld xmlns:a="http://schemas.openxmlformats.org/drawingml/2006/main" xmlns:r="http://schemas.openxmlformats.org/officeDocument/2006/relationships" xmlns:p="http://schemas.openxmlformats.org/presentationml/2006/main">
   <p:cSld name="Slide 7">
     <p:bg>
@@ -11395,7 +9690,7 @@
 </p:sld>
 </file>
 
-<file path=ppt/slides/slide8.xml><?xml version="1.0" encoding="utf-8"?>
+<file path=ppt/slides/slide7.xml><?xml version="1.0" encoding="utf-8"?>
 <p:sld xmlns:a="http://schemas.openxmlformats.org/drawingml/2006/main" xmlns:r="http://schemas.openxmlformats.org/officeDocument/2006/relationships" xmlns:p="http://schemas.openxmlformats.org/presentationml/2006/main">
   <p:cSld name="Slide 8">
     <p:bg>
@@ -12513,7 +10808,7 @@
 </p:sld>
 </file>
 
-<file path=ppt/slides/slide9.xml><?xml version="1.0" encoding="utf-8"?>
+<file path=ppt/slides/slide8.xml><?xml version="1.0" encoding="utf-8"?>
 <p:sld xmlns:a="http://schemas.openxmlformats.org/drawingml/2006/main" xmlns:r="http://schemas.openxmlformats.org/officeDocument/2006/relationships" xmlns:p="http://schemas.openxmlformats.org/presentationml/2006/main">
   <p:cSld name="Slide 9">
     <p:bg>
@@ -14311,6 +12606,914 @@
 </p:sld>
 </file>
 
+<file path=ppt/slides/slide9.xml><?xml version="1.0" encoding="utf-8"?>
+<p:sld xmlns:a="http://schemas.openxmlformats.org/drawingml/2006/main" xmlns:r="http://schemas.openxmlformats.org/officeDocument/2006/relationships" xmlns:p="http://schemas.openxmlformats.org/presentationml/2006/main">
+  <p:cSld name="Slide 10">
+    <p:bg>
+      <p:bgPr>
+        <a:solidFill>
+          <a:srgbClr val="0A1628"/>
+        </a:solidFill>
+      </p:bgPr>
+    </p:bg>
+    <p:spTree>
+      <p:nvGrpSpPr>
+        <p:cNvPr id="1" name=""/>
+        <p:cNvGrpSpPr/>
+        <p:nvPr/>
+      </p:nvGrpSpPr>
+      <p:grpSpPr>
+        <a:xfrm>
+          <a:off x="0" y="0"/>
+          <a:ext cx="0" cy="0"/>
+          <a:chOff x="0" y="0"/>
+          <a:chExt cx="0" cy="0"/>
+        </a:xfrm>
+      </p:grpSpPr>
+      <p:sp>
+        <p:nvSpPr>
+          <p:cNvPr id="2" name="Shape 0"/>
+          <p:cNvSpPr/>
+          <p:nvPr/>
+        </p:nvSpPr>
+        <p:spPr>
+          <a:xfrm>
+            <a:off x="0" y="0"/>
+            <a:ext cx="9144000" cy="54864"/>
+          </a:xfrm>
+          <a:prstGeom prst="rect">
+            <a:avLst/>
+          </a:prstGeom>
+          <a:solidFill>
+            <a:srgbClr val="0D9488"/>
+          </a:solidFill>
+          <a:ln/>
+        </p:spPr>
+      </p:sp>
+      <p:sp>
+        <p:nvSpPr>
+          <p:cNvPr id="3" name="Text 1"/>
+          <p:cNvSpPr/>
+          <p:nvPr/>
+        </p:nvSpPr>
+        <p:spPr>
+          <a:xfrm>
+            <a:off x="640080" y="320040"/>
+            <a:ext cx="8229600" cy="548640"/>
+          </a:xfrm>
+          <a:prstGeom prst="rect">
+            <a:avLst/>
+          </a:prstGeom>
+          <a:noFill/>
+          <a:ln/>
+        </p:spPr>
+        <p:txBody>
+          <a:bodyPr wrap="square" lIns="0" tIns="0" rIns="0" bIns="0" rtlCol="0" anchor="ctr"/>
+          <a:lstStyle/>
+          <a:p>
+            <a:pPr indent="0" marL="0">
+              <a:buNone/>
+            </a:pPr>
+            <a:r>
+              <a:rPr lang="en-US" sz="2400" dirty="0">
+                <a:solidFill>
+                  <a:srgbClr val="FFFFFF"/>
+                </a:solidFill>
+                <a:latin typeface="Arial Black" pitchFamily="34" charset="0"/>
+                <a:ea typeface="Arial Black" pitchFamily="34" charset="-122"/>
+                <a:cs typeface="Arial Black" pitchFamily="34" charset="-120"/>
+              </a:rPr>
+              <a:t>Code: Node C — Consumer &amp; Pipeline Summary</a:t>
+            </a:r>
+            <a:endParaRPr lang="en-US" sz="2400" dirty="0"/>
+          </a:p>
+        </p:txBody>
+      </p:sp>
+      <p:sp>
+        <p:nvSpPr>
+          <p:cNvPr id="4" name="Shape 2"/>
+          <p:cNvSpPr/>
+          <p:nvPr/>
+        </p:nvSpPr>
+        <p:spPr>
+          <a:xfrm>
+            <a:off x="457200" y="1005840"/>
+            <a:ext cx="4572000" cy="2377440"/>
+          </a:xfrm>
+          <a:prstGeom prst="rect">
+            <a:avLst/>
+          </a:prstGeom>
+          <a:solidFill>
+            <a:srgbClr val="0D1B2A"/>
+          </a:solidFill>
+          <a:ln/>
+          <a:effectLst>
+            <a:outerShdw sx="100000" sy="100000" kx="0" ky="0" algn="bl" rotWithShape="0" blurRad="101600" dist="38100" dir="8100000">
+              <a:srgbClr val="000000">
+                <a:alpha val="20000"/>
+              </a:srgbClr>
+            </a:outerShdw>
+          </a:effectLst>
+        </p:spPr>
+      </p:sp>
+      <p:sp>
+        <p:nvSpPr>
+          <p:cNvPr id="5" name="Text 3"/>
+          <p:cNvSpPr/>
+          <p:nvPr/>
+        </p:nvSpPr>
+        <p:spPr>
+          <a:xfrm>
+            <a:off x="640080" y="1143000"/>
+            <a:ext cx="4206240" cy="2103120"/>
+          </a:xfrm>
+          <a:prstGeom prst="rect">
+            <a:avLst/>
+          </a:prstGeom>
+          <a:noFill/>
+          <a:ln/>
+        </p:spPr>
+        <p:txBody>
+          <a:bodyPr wrap="square" lIns="0" tIns="0" rIns="0" bIns="0" rtlCol="0" anchor="ctr"/>
+          <a:lstStyle/>
+          <a:p>
+            <a:pPr indent="0" marL="0">
+              <a:lnSpc>
+                <a:spcPct val="125000"/>
+              </a:lnSpc>
+              <a:buNone/>
+            </a:pPr>
+            <a:r>
+              <a:rPr lang="en-US" sz="1000" dirty="0">
+                <a:solidFill>
+                  <a:srgbClr val="6A9955"/>
+                </a:solidFill>
+                <a:latin typeface="Consolas" pitchFamily="34" charset="0"/>
+                <a:ea typeface="Consolas" pitchFamily="34" charset="-122"/>
+                <a:cs typeface="Consolas" pitchFamily="34" charset="-120"/>
+              </a:rPr>
+              <a:t>// Node C: Consumer (threads 16-31)</a:t>
+            </a:r>
+            <a:endParaRPr lang="en-US" sz="1000" dirty="0"/>
+          </a:p>
+          <a:p>
+            <a:pPr indent="0" marL="0">
+              <a:lnSpc>
+                <a:spcPct val="125000"/>
+              </a:lnSpc>
+              <a:buNone/>
+            </a:pPr>
+            <a:r>
+              <a:rPr lang="en-US" sz="1000" dirty="0">
+                <a:solidFill>
+                  <a:srgbClr val="C586C0"/>
+                </a:solidFill>
+                <a:latin typeface="Consolas" pitchFamily="34" charset="0"/>
+                <a:ea typeface="Consolas" pitchFamily="34" charset="-122"/>
+                <a:cs typeface="Consolas" pitchFamily="34" charset="-120"/>
+              </a:rPr>
+              <a:t>else {</a:t>
+            </a:r>
+            <a:endParaRPr lang="en-US" sz="1000" dirty="0"/>
+          </a:p>
+          <a:p>
+            <a:pPr indent="0" marL="0">
+              <a:lnSpc>
+                <a:spcPct val="125000"/>
+              </a:lnSpc>
+              <a:buNone/>
+            </a:pPr>
+            <a:r>
+              <a:rPr lang="en-US" sz="1000" dirty="0">
+                <a:solidFill>
+                  <a:srgbClr val="94A3B8"/>
+                </a:solidFill>
+                <a:latin typeface="Consolas" pitchFamily="34" charset="0"/>
+                <a:ea typeface="Consolas" pitchFamily="34" charset="-122"/>
+                <a:cs typeface="Consolas" pitchFamily="34" charset="-120"/>
+              </a:rPr>
+              <a:t>  uint cur = control.q2.count;</a:t>
+            </a:r>
+            <a:endParaRPr lang="en-US" sz="1000" dirty="0"/>
+          </a:p>
+          <a:p>
+            <a:pPr indent="0" marL="0">
+              <a:lnSpc>
+                <a:spcPct val="125000"/>
+              </a:lnSpc>
+              <a:buNone/>
+            </a:pPr>
+            <a:r>
+              <a:rPr lang="en-US" sz="1000" dirty="0">
+                <a:solidFill>
+                  <a:srgbClr val="C586C0"/>
+                </a:solidFill>
+                <a:latin typeface="Consolas" pitchFamily="34" charset="0"/>
+                <a:ea typeface="Consolas" pitchFamily="34" charset="-122"/>
+                <a:cs typeface="Consolas" pitchFamily="34" charset="-120"/>
+              </a:rPr>
+              <a:t>  if (cur &gt; 0) {</a:t>
+            </a:r>
+            <a:endParaRPr lang="en-US" sz="1000" dirty="0"/>
+          </a:p>
+          <a:p>
+            <a:pPr indent="0" marL="0">
+              <a:lnSpc>
+                <a:spcPct val="125000"/>
+              </a:lnSpc>
+              <a:buNone/>
+            </a:pPr>
+            <a:r>
+              <a:rPr lang="en-US" sz="1000" dirty="0">
+                <a:solidFill>
+                  <a:srgbClr val="DCDCAA"/>
+                </a:solidFill>
+                <a:latin typeface="Consolas" pitchFamily="34" charset="0"/>
+                <a:ea typeface="Consolas" pitchFamily="34" charset="-122"/>
+                <a:cs typeface="Consolas" pitchFamily="34" charset="-120"/>
+              </a:rPr>
+              <a:t>    if (atomicCompSwap(q2.count,</a:t>
+            </a:r>
+            <a:endParaRPr lang="en-US" sz="1000" dirty="0"/>
+          </a:p>
+          <a:p>
+            <a:pPr indent="0" marL="0">
+              <a:lnSpc>
+                <a:spcPct val="125000"/>
+              </a:lnSpc>
+              <a:buNone/>
+            </a:pPr>
+            <a:r>
+              <a:rPr lang="en-US" sz="1000" dirty="0">
+                <a:solidFill>
+                  <a:srgbClr val="DCDCAA"/>
+                </a:solidFill>
+                <a:latin typeface="Consolas" pitchFamily="34" charset="0"/>
+                <a:ea typeface="Consolas" pitchFamily="34" charset="-122"/>
+                <a:cs typeface="Consolas" pitchFamily="34" charset="-120"/>
+              </a:rPr>
+              <a:t>        cur, cur - 1) == cur) {</a:t>
+            </a:r>
+            <a:endParaRPr lang="en-US" sz="1000" dirty="0"/>
+          </a:p>
+          <a:p>
+            <a:pPr indent="0" marL="0">
+              <a:lnSpc>
+                <a:spcPct val="125000"/>
+              </a:lnSpc>
+              <a:buNone/>
+            </a:pPr>
+            <a:r>
+              <a:rPr lang="en-US" sz="1000" dirty="0">
+                <a:solidFill>
+                  <a:srgbClr val="4EC9B0"/>
+                </a:solidFill>
+                <a:latin typeface="Consolas" pitchFamily="34" charset="0"/>
+                <a:ea typeface="Consolas" pitchFamily="34" charset="-122"/>
+                <a:cs typeface="Consolas" pitchFamily="34" charset="-120"/>
+              </a:rPr>
+              <a:t>      slot = atomicAdd(</a:t>
+            </a:r>
+            <a:endParaRPr lang="en-US" sz="1000" dirty="0"/>
+          </a:p>
+          <a:p>
+            <a:pPr indent="0" marL="0">
+              <a:lnSpc>
+                <a:spcPct val="125000"/>
+              </a:lnSpc>
+              <a:buNone/>
+            </a:pPr>
+            <a:r>
+              <a:rPr lang="en-US" sz="1000" dirty="0">
+                <a:solidFill>
+                  <a:srgbClr val="4EC9B0"/>
+                </a:solidFill>
+                <a:latin typeface="Consolas" pitchFamily="34" charset="0"/>
+                <a:ea typeface="Consolas" pitchFamily="34" charset="-122"/>
+                <a:cs typeface="Consolas" pitchFamily="34" charset="-120"/>
+              </a:rPr>
+              <a:t>        q2.head, 1) % QUEUE_SIZE;</a:t>
+            </a:r>
+            <a:endParaRPr lang="en-US" sz="1000" dirty="0"/>
+          </a:p>
+          <a:p>
+            <a:pPr indent="0" marL="0">
+              <a:lnSpc>
+                <a:spcPct val="125000"/>
+              </a:lnSpc>
+              <a:buNone/>
+            </a:pPr>
+            <a:r>
+              <a:rPr lang="en-US" sz="1000" dirty="0">
+                <a:solidFill>
+                  <a:srgbClr val="94A3B8"/>
+                </a:solidFill>
+                <a:latin typeface="Consolas" pitchFamily="34" charset="0"/>
+                <a:ea typeface="Consolas" pitchFamily="34" charset="-122"/>
+                <a:cs typeface="Consolas" pitchFamily="34" charset="-120"/>
+              </a:rPr>
+              <a:t>      uint data = queue2</a:t>
+            </a:r>
+            <a:endParaRPr lang="en-US" sz="1000" dirty="0"/>
+          </a:p>
+          <a:p>
+            <a:pPr indent="0" marL="0">
+              <a:lnSpc>
+                <a:spcPct val="125000"/>
+              </a:lnSpc>
+              <a:buNone/>
+            </a:pPr>
+            <a:r>
+              <a:rPr lang="en-US" sz="1000" dirty="0">
+                <a:solidFill>
+                  <a:srgbClr val="94A3B8"/>
+                </a:solidFill>
+                <a:latin typeface="Consolas" pitchFamily="34" charset="0"/>
+                <a:ea typeface="Consolas" pitchFamily="34" charset="-122"/>
+                <a:cs typeface="Consolas" pitchFamily="34" charset="-120"/>
+              </a:rPr>
+              <a:t>        .tasks[slot].payload[0];</a:t>
+            </a:r>
+            <a:endParaRPr lang="en-US" sz="1000" dirty="0"/>
+          </a:p>
+          <a:p>
+            <a:pPr indent="0" marL="0">
+              <a:lnSpc>
+                <a:spcPct val="125000"/>
+              </a:lnSpc>
+              <a:buNone/>
+            </a:pPr>
+            <a:r>
+              <a:rPr lang="en-US" sz="1000" dirty="0">
+                <a:solidFill>
+                  <a:srgbClr val="CE9178"/>
+                </a:solidFill>
+                <a:latin typeface="Consolas" pitchFamily="34" charset="0"/>
+                <a:ea typeface="Consolas" pitchFamily="34" charset="-122"/>
+                <a:cs typeface="Consolas" pitchFamily="34" charset="-120"/>
+              </a:rPr>
+              <a:t>      memoryBarrierBuffer();</a:t>
+            </a:r>
+            <a:endParaRPr lang="en-US" sz="1000" dirty="0"/>
+          </a:p>
+          <a:p>
+            <a:pPr indent="0" marL="0">
+              <a:lnSpc>
+                <a:spcPct val="125000"/>
+              </a:lnSpc>
+              <a:buNone/>
+            </a:pPr>
+            <a:endParaRPr lang="en-US" sz="1000" dirty="0"/>
+          </a:p>
+          <a:p>
+            <a:pPr indent="0" marL="0">
+              <a:lnSpc>
+                <a:spcPct val="125000"/>
+              </a:lnSpc>
+              <a:buNone/>
+            </a:pPr>
+            <a:r>
+              <a:rPr lang="en-US" sz="1000" dirty="0">
+                <a:solidFill>
+                  <a:srgbClr val="4EC9B0"/>
+                </a:solidFill>
+                <a:latin typeface="Consolas" pitchFamily="34" charset="0"/>
+                <a:ea typeface="Consolas" pitchFamily="34" charset="-122"/>
+                <a:cs typeface="Consolas" pitchFamily="34" charset="-120"/>
+              </a:rPr>
+              <a:t>      atomicAdd(totalProcessed, 1);</a:t>
+            </a:r>
+            <a:endParaRPr lang="en-US" sz="1000" dirty="0"/>
+          </a:p>
+          <a:p>
+            <a:pPr indent="0" marL="0">
+              <a:lnSpc>
+                <a:spcPct val="125000"/>
+              </a:lnSpc>
+              <a:buNone/>
+            </a:pPr>
+            <a:r>
+              <a:rPr lang="en-US" sz="1000" dirty="0">
+                <a:solidFill>
+                  <a:srgbClr val="C586C0"/>
+                </a:solidFill>
+                <a:latin typeface="Consolas" pitchFamily="34" charset="0"/>
+                <a:ea typeface="Consolas" pitchFamily="34" charset="-122"/>
+                <a:cs typeface="Consolas" pitchFamily="34" charset="-120"/>
+              </a:rPr>
+              <a:t>    }</a:t>
+            </a:r>
+            <a:endParaRPr lang="en-US" sz="1000" dirty="0"/>
+          </a:p>
+          <a:p>
+            <a:pPr indent="0" marL="0">
+              <a:lnSpc>
+                <a:spcPct val="125000"/>
+              </a:lnSpc>
+              <a:buNone/>
+            </a:pPr>
+            <a:r>
+              <a:rPr lang="en-US" sz="1000" dirty="0">
+                <a:solidFill>
+                  <a:srgbClr val="C586C0"/>
+                </a:solidFill>
+                <a:latin typeface="Consolas" pitchFamily="34" charset="0"/>
+                <a:ea typeface="Consolas" pitchFamily="34" charset="-122"/>
+                <a:cs typeface="Consolas" pitchFamily="34" charset="-120"/>
+              </a:rPr>
+              <a:t>  }</a:t>
+            </a:r>
+            <a:endParaRPr lang="en-US" sz="1000" dirty="0"/>
+          </a:p>
+          <a:p>
+            <a:pPr indent="0" marL="0">
+              <a:lnSpc>
+                <a:spcPct val="125000"/>
+              </a:lnSpc>
+              <a:buNone/>
+            </a:pPr>
+            <a:r>
+              <a:rPr lang="en-US" sz="1000" dirty="0">
+                <a:solidFill>
+                  <a:srgbClr val="C586C0"/>
+                </a:solidFill>
+                <a:latin typeface="Consolas" pitchFamily="34" charset="0"/>
+                <a:ea typeface="Consolas" pitchFamily="34" charset="-122"/>
+                <a:cs typeface="Consolas" pitchFamily="34" charset="-120"/>
+              </a:rPr>
+              <a:t>}</a:t>
+            </a:r>
+            <a:endParaRPr lang="en-US" sz="1000" dirty="0"/>
+          </a:p>
+        </p:txBody>
+      </p:sp>
+      <p:sp>
+        <p:nvSpPr>
+          <p:cNvPr id="6" name="Shape 4"/>
+          <p:cNvSpPr/>
+          <p:nvPr/>
+        </p:nvSpPr>
+        <p:spPr>
+          <a:xfrm>
+            <a:off x="5212080" y="1005840"/>
+            <a:ext cx="3657600" cy="2377440"/>
+          </a:xfrm>
+          <a:prstGeom prst="rect">
+            <a:avLst/>
+          </a:prstGeom>
+          <a:solidFill>
+            <a:srgbClr val="1A2D4D"/>
+          </a:solidFill>
+          <a:ln/>
+          <a:effectLst>
+            <a:outerShdw sx="100000" sy="100000" kx="0" ky="0" algn="bl" rotWithShape="0" blurRad="101600" dist="38100" dir="8100000">
+              <a:srgbClr val="000000">
+                <a:alpha val="20000"/>
+              </a:srgbClr>
+            </a:outerShdw>
+          </a:effectLst>
+        </p:spPr>
+      </p:sp>
+      <p:sp>
+        <p:nvSpPr>
+          <p:cNvPr id="7" name="Shape 5"/>
+          <p:cNvSpPr/>
+          <p:nvPr/>
+        </p:nvSpPr>
+        <p:spPr>
+          <a:xfrm>
+            <a:off x="5212080" y="1005840"/>
+            <a:ext cx="64008" cy="2377440"/>
+          </a:xfrm>
+          <a:prstGeom prst="rect">
+            <a:avLst/>
+          </a:prstGeom>
+          <a:solidFill>
+            <a:srgbClr val="06B6D4"/>
+          </a:solidFill>
+          <a:ln/>
+        </p:spPr>
+      </p:sp>
+      <p:sp>
+        <p:nvSpPr>
+          <p:cNvPr id="8" name="Text 6"/>
+          <p:cNvSpPr/>
+          <p:nvPr/>
+        </p:nvSpPr>
+        <p:spPr>
+          <a:xfrm>
+            <a:off x="5486400" y="1097280"/>
+            <a:ext cx="2743200" cy="274320"/>
+          </a:xfrm>
+          <a:prstGeom prst="rect">
+            <a:avLst/>
+          </a:prstGeom>
+          <a:noFill/>
+          <a:ln/>
+        </p:spPr>
+        <p:txBody>
+          <a:bodyPr wrap="square" lIns="0" tIns="0" rIns="0" bIns="0" rtlCol="0" anchor="ctr"/>
+          <a:lstStyle/>
+          <a:p>
+            <a:pPr indent="0" marL="0">
+              <a:buNone/>
+            </a:pPr>
+            <a:r>
+              <a:rPr lang="en-US" sz="1300" dirty="0">
+                <a:solidFill>
+                  <a:srgbClr val="06B6D4"/>
+                </a:solidFill>
+                <a:latin typeface="Arial Black" pitchFamily="34" charset="0"/>
+                <a:ea typeface="Arial Black" pitchFamily="34" charset="-122"/>
+                <a:cs typeface="Arial Black" pitchFamily="34" charset="-120"/>
+              </a:rPr>
+              <a:t>Consumer Pattern</a:t>
+            </a:r>
+            <a:endParaRPr lang="en-US" sz="1300" dirty="0"/>
+          </a:p>
+        </p:txBody>
+      </p:sp>
+      <p:sp>
+        <p:nvSpPr>
+          <p:cNvPr id="9" name="Text 7"/>
+          <p:cNvSpPr/>
+          <p:nvPr/>
+        </p:nvSpPr>
+        <p:spPr>
+          <a:xfrm>
+            <a:off x="5486400" y="1417320"/>
+            <a:ext cx="3108960" cy="1645920"/>
+          </a:xfrm>
+          <a:prstGeom prst="rect">
+            <a:avLst/>
+          </a:prstGeom>
+          <a:noFill/>
+          <a:ln/>
+        </p:spPr>
+        <p:txBody>
+          <a:bodyPr wrap="square" lIns="0" tIns="0" rIns="0" bIns="0" rtlCol="0" anchor="ctr"/>
+          <a:lstStyle/>
+          <a:p>
+            <a:pPr indent="0" marL="0">
+              <a:buNone/>
+            </a:pPr>
+            <a:r>
+              <a:rPr lang="en-US" sz="1100" dirty="0">
+                <a:solidFill>
+                  <a:srgbClr val="94A3B8"/>
+                </a:solidFill>
+                <a:latin typeface="Calibri" pitchFamily="34" charset="0"/>
+                <a:ea typeface="Calibri" pitchFamily="34" charset="-122"/>
+                <a:cs typeface="Calibri" pitchFamily="34" charset="-120"/>
+              </a:rPr>
+              <a:t>Same CAS pop pattern as Node B's Q1 read:</a:t>
+            </a:r>
+            <a:endParaRPr lang="en-US" sz="1100" dirty="0"/>
+          </a:p>
+          <a:p>
+            <a:pPr indent="0" marL="0">
+              <a:buNone/>
+            </a:pPr>
+            <a:endParaRPr lang="en-US" sz="1100" dirty="0"/>
+          </a:p>
+          <a:p>
+            <a:pPr indent="0" marL="0">
+              <a:buNone/>
+            </a:pPr>
+            <a:r>
+              <a:rPr lang="en-US" sz="1100" dirty="0">
+                <a:solidFill>
+                  <a:srgbClr val="FFFFFF"/>
+                </a:solidFill>
+                <a:latin typeface="Calibri" pitchFamily="34" charset="0"/>
+                <a:ea typeface="Calibri" pitchFamily="34" charset="-122"/>
+                <a:cs typeface="Calibri" pitchFamily="34" charset="-120"/>
+              </a:rPr>
+              <a:t>1. Read count (optimistic)</a:t>
+            </a:r>
+            <a:endParaRPr lang="en-US" sz="1100" dirty="0"/>
+          </a:p>
+          <a:p>
+            <a:pPr indent="0" marL="0">
+              <a:buNone/>
+            </a:pPr>
+            <a:r>
+              <a:rPr lang="en-US" sz="1100" dirty="0">
+                <a:solidFill>
+                  <a:srgbClr val="FFFFFF"/>
+                </a:solidFill>
+                <a:latin typeface="Calibri" pitchFamily="34" charset="0"/>
+                <a:ea typeface="Calibri" pitchFamily="34" charset="-122"/>
+                <a:cs typeface="Calibri" pitchFamily="34" charset="-120"/>
+              </a:rPr>
+              <a:t>2. CAS decrement count</a:t>
+            </a:r>
+            <a:endParaRPr lang="en-US" sz="1100" dirty="0"/>
+          </a:p>
+          <a:p>
+            <a:pPr indent="0" marL="0">
+              <a:buNone/>
+            </a:pPr>
+            <a:r>
+              <a:rPr lang="en-US" sz="1100" dirty="0">
+                <a:solidFill>
+                  <a:srgbClr val="FFFFFF"/>
+                </a:solidFill>
+                <a:latin typeface="Calibri" pitchFamily="34" charset="0"/>
+                <a:ea typeface="Calibri" pitchFamily="34" charset="-122"/>
+                <a:cs typeface="Calibri" pitchFamily="34" charset="-120"/>
+              </a:rPr>
+              <a:t>3. atomicAdd head for slot</a:t>
+            </a:r>
+            <a:endParaRPr lang="en-US" sz="1100" dirty="0"/>
+          </a:p>
+          <a:p>
+            <a:pPr indent="0" marL="0">
+              <a:buNone/>
+            </a:pPr>
+            <a:r>
+              <a:rPr lang="en-US" sz="1100" dirty="0">
+                <a:solidFill>
+                  <a:srgbClr val="FFFFFF"/>
+                </a:solidFill>
+                <a:latin typeface="Calibri" pitchFamily="34" charset="0"/>
+                <a:ea typeface="Calibri" pitchFamily="34" charset="-122"/>
+                <a:cs typeface="Calibri" pitchFamily="34" charset="-120"/>
+              </a:rPr>
+              <a:t>4. Read data + barrier</a:t>
+            </a:r>
+            <a:endParaRPr lang="en-US" sz="1100" dirty="0"/>
+          </a:p>
+          <a:p>
+            <a:pPr indent="0" marL="0">
+              <a:buNone/>
+            </a:pPr>
+            <a:endParaRPr lang="en-US" sz="1100" dirty="0"/>
+          </a:p>
+          <a:p>
+            <a:pPr indent="0" marL="0">
+              <a:buNone/>
+            </a:pPr>
+            <a:r>
+              <a:rPr lang="en-US" sz="1100" b="1" dirty="0">
+                <a:solidFill>
+                  <a:srgbClr val="14B8A6"/>
+                </a:solidFill>
+                <a:latin typeface="Calibri" pitchFamily="34" charset="0"/>
+                <a:ea typeface="Calibri" pitchFamily="34" charset="-122"/>
+                <a:cs typeface="Calibri" pitchFamily="34" charset="-120"/>
+              </a:rPr>
+              <a:t>Final step: atomicAdd(totalProcessed, 1)</a:t>
+            </a:r>
+            <a:endParaRPr lang="en-US" sz="1100" dirty="0"/>
+          </a:p>
+          <a:p>
+            <a:pPr indent="0" marL="0">
+              <a:buNone/>
+            </a:pPr>
+            <a:r>
+              <a:rPr lang="en-US" sz="1100" dirty="0">
+                <a:solidFill>
+                  <a:srgbClr val="94A3B8"/>
+                </a:solidFill>
+                <a:latin typeface="Calibri" pitchFamily="34" charset="0"/>
+                <a:ea typeface="Calibri" pitchFamily="34" charset="-122"/>
+                <a:cs typeface="Calibri" pitchFamily="34" charset="-120"/>
+              </a:rPr>
+              <a:t>This is what the host polls to track GPU progress.</a:t>
+            </a:r>
+            <a:endParaRPr lang="en-US" sz="1100" dirty="0"/>
+          </a:p>
+        </p:txBody>
+      </p:sp>
+      <p:sp>
+        <p:nvSpPr>
+          <p:cNvPr id="10" name="Shape 8"/>
+          <p:cNvSpPr/>
+          <p:nvPr/>
+        </p:nvSpPr>
+        <p:spPr>
+          <a:xfrm>
+            <a:off x="457200" y="3657600"/>
+            <a:ext cx="8412480" cy="1188720"/>
+          </a:xfrm>
+          <a:prstGeom prst="rect">
+            <a:avLst/>
+          </a:prstGeom>
+          <a:solidFill>
+            <a:srgbClr val="1A2D4D"/>
+          </a:solidFill>
+          <a:ln/>
+          <a:effectLst>
+            <a:outerShdw sx="100000" sy="100000" kx="0" ky="0" algn="bl" rotWithShape="0" blurRad="101600" dist="38100" dir="8100000">
+              <a:srgbClr val="000000">
+                <a:alpha val="20000"/>
+              </a:srgbClr>
+            </a:outerShdw>
+          </a:effectLst>
+        </p:spPr>
+      </p:sp>
+      <p:sp>
+        <p:nvSpPr>
+          <p:cNvPr id="11" name="Shape 9"/>
+          <p:cNvSpPr/>
+          <p:nvPr/>
+        </p:nvSpPr>
+        <p:spPr>
+          <a:xfrm>
+            <a:off x="457200" y="3657600"/>
+            <a:ext cx="64008" cy="1188720"/>
+          </a:xfrm>
+          <a:prstGeom prst="rect">
+            <a:avLst/>
+          </a:prstGeom>
+          <a:solidFill>
+            <a:srgbClr val="0D9488"/>
+          </a:solidFill>
+          <a:ln/>
+        </p:spPr>
+      </p:sp>
+      <p:sp>
+        <p:nvSpPr>
+          <p:cNvPr id="12" name="Text 10"/>
+          <p:cNvSpPr/>
+          <p:nvPr/>
+        </p:nvSpPr>
+        <p:spPr>
+          <a:xfrm>
+            <a:off x="731520" y="3749040"/>
+            <a:ext cx="7315200" cy="274320"/>
+          </a:xfrm>
+          <a:prstGeom prst="rect">
+            <a:avLst/>
+          </a:prstGeom>
+          <a:noFill/>
+          <a:ln/>
+        </p:spPr>
+        <p:txBody>
+          <a:bodyPr wrap="square" lIns="0" tIns="0" rIns="0" bIns="0" rtlCol="0" anchor="ctr"/>
+          <a:lstStyle/>
+          <a:p>
+            <a:pPr indent="0" marL="0">
+              <a:buNone/>
+            </a:pPr>
+            <a:r>
+              <a:rPr lang="en-US" sz="1400" dirty="0">
+                <a:solidFill>
+                  <a:srgbClr val="14B8A6"/>
+                </a:solidFill>
+                <a:latin typeface="Arial Black" pitchFamily="34" charset="0"/>
+                <a:ea typeface="Arial Black" pitchFamily="34" charset="-122"/>
+                <a:cs typeface="Arial Black" pitchFamily="34" charset="-120"/>
+              </a:rPr>
+              <a:t>Full Pipeline: One Dispatch, Three Roles, Two Queues</a:t>
+            </a:r>
+            <a:endParaRPr lang="en-US" sz="1400" dirty="0"/>
+          </a:p>
+        </p:txBody>
+      </p:sp>
+      <p:sp>
+        <p:nvSpPr>
+          <p:cNvPr id="13" name="Text 11"/>
+          <p:cNvSpPr/>
+          <p:nvPr/>
+        </p:nvSpPr>
+        <p:spPr>
+          <a:xfrm>
+            <a:off x="731520" y="4114800"/>
+            <a:ext cx="7772400" cy="274320"/>
+          </a:xfrm>
+          <a:prstGeom prst="rect">
+            <a:avLst/>
+          </a:prstGeom>
+          <a:noFill/>
+          <a:ln/>
+        </p:spPr>
+        <p:txBody>
+          <a:bodyPr wrap="square" lIns="0" tIns="0" rIns="0" bIns="0" rtlCol="0" anchor="ctr"/>
+          <a:lstStyle/>
+          <a:p>
+            <a:pPr indent="0" marL="0">
+              <a:buNone/>
+            </a:pPr>
+            <a:r>
+              <a:rPr lang="en-US" sz="1200" b="1" dirty="0">
+                <a:solidFill>
+                  <a:srgbClr val="FFFFFF"/>
+                </a:solidFill>
+                <a:latin typeface="Calibri" pitchFamily="34" charset="0"/>
+                <a:ea typeface="Calibri" pitchFamily="34" charset="-122"/>
+                <a:cs typeface="Calibri" pitchFamily="34" charset="-120"/>
+              </a:rPr>
+              <a:t>Node A (1 thread)</a:t>
+            </a:r>
+            <a:pPr indent="0" marL="0">
+              <a:buNone/>
+            </a:pPr>
+            <a:r>
+              <a:rPr lang="en-US" sz="1200" dirty="0">
+                <a:solidFill>
+                  <a:srgbClr val="94A3B8"/>
+                </a:solidFill>
+                <a:latin typeface="Calibri" pitchFamily="34" charset="0"/>
+                <a:ea typeface="Calibri" pitchFamily="34" charset="-122"/>
+                <a:cs typeface="Calibri" pitchFamily="34" charset="-120"/>
+              </a:rPr>
+              <a:t>  --[CAS push Q1]--&gt;  </a:t>
+            </a:r>
+            <a:pPr indent="0" marL="0">
+              <a:buNone/>
+            </a:pPr>
+            <a:r>
+              <a:rPr lang="en-US" sz="1200" b="1" dirty="0">
+                <a:solidFill>
+                  <a:srgbClr val="FFFFFF"/>
+                </a:solidFill>
+                <a:latin typeface="Calibri" pitchFamily="34" charset="0"/>
+                <a:ea typeface="Calibri" pitchFamily="34" charset="-122"/>
+                <a:cs typeface="Calibri" pitchFamily="34" charset="-120"/>
+              </a:rPr>
+              <a:t>Node B (15 threads)</a:t>
+            </a:r>
+            <a:pPr indent="0" marL="0">
+              <a:buNone/>
+            </a:pPr>
+            <a:r>
+              <a:rPr lang="en-US" sz="1200" dirty="0">
+                <a:solidFill>
+                  <a:srgbClr val="94A3B8"/>
+                </a:solidFill>
+                <a:latin typeface="Calibri" pitchFamily="34" charset="0"/>
+                <a:ea typeface="Calibri" pitchFamily="34" charset="-122"/>
+                <a:cs typeface="Calibri" pitchFamily="34" charset="-120"/>
+              </a:rPr>
+              <a:t>  --[CAS push Q2]--&gt;  </a:t>
+            </a:r>
+            <a:pPr indent="0" marL="0">
+              <a:buNone/>
+            </a:pPr>
+            <a:r>
+              <a:rPr lang="en-US" sz="1200" b="1" dirty="0">
+                <a:solidFill>
+                  <a:srgbClr val="FFFFFF"/>
+                </a:solidFill>
+                <a:latin typeface="Calibri" pitchFamily="34" charset="0"/>
+                <a:ea typeface="Calibri" pitchFamily="34" charset="-122"/>
+                <a:cs typeface="Calibri" pitchFamily="34" charset="-120"/>
+              </a:rPr>
+              <a:t>Node C (16 threads)</a:t>
+            </a:r>
+            <a:endParaRPr lang="en-US" sz="1200" dirty="0"/>
+          </a:p>
+        </p:txBody>
+      </p:sp>
+      <p:sp>
+        <p:nvSpPr>
+          <p:cNvPr id="14" name="Text 12"/>
+          <p:cNvSpPr/>
+          <p:nvPr/>
+        </p:nvSpPr>
+        <p:spPr>
+          <a:xfrm>
+            <a:off x="731520" y="4480560"/>
+            <a:ext cx="7772400" cy="274320"/>
+          </a:xfrm>
+          <a:prstGeom prst="rect">
+            <a:avLst/>
+          </a:prstGeom>
+          <a:noFill/>
+          <a:ln/>
+        </p:spPr>
+        <p:txBody>
+          <a:bodyPr wrap="square" lIns="0" tIns="0" rIns="0" bIns="0" rtlCol="0" anchor="ctr"/>
+          <a:lstStyle/>
+          <a:p>
+            <a:pPr indent="0" marL="0">
+              <a:buNone/>
+            </a:pPr>
+            <a:r>
+              <a:rPr lang="en-US" sz="1200" i="1" dirty="0">
+                <a:solidFill>
+                  <a:srgbClr val="94A3B8"/>
+                </a:solidFill>
+                <a:latin typeface="Calibri" pitchFamily="34" charset="0"/>
+                <a:ea typeface="Calibri" pitchFamily="34" charset="-122"/>
+                <a:cs typeface="Calibri" pitchFamily="34" charset="-120"/>
+              </a:rPr>
+              <a:t>All running in a single vkCmdDispatch. No CPU round-trips. GPU-driven scheduling via CAS atomics.</a:t>
+            </a:r>
+            <a:endParaRPr lang="en-US" sz="1200" dirty="0"/>
+          </a:p>
+        </p:txBody>
+      </p:sp>
+    </p:spTree>
+  </p:cSld>
+  <p:clrMapOvr>
+    <a:masterClrMapping/>
+  </p:clrMapOvr>
+</p:sld>
+</file>
+
 <file path=ppt/theme/theme1.xml><?xml version="1.0" encoding="utf-8"?>
 <a:theme xmlns:a="http://schemas.openxmlformats.org/drawingml/2006/main" name="Office Theme">
   <a:themeElements>
